--- a/Presentation_Cookie_Classifier.pptx
+++ b/Presentation_Cookie_Classifier.pptx
@@ -21,8 +21,10 @@
     <p:sldId id="270" r:id="rId15"/>
     <p:sldId id="271" r:id="rId16"/>
     <p:sldId id="272" r:id="rId17"/>
-    <p:sldId id="273" r:id="rId18"/>
-    <p:sldId id="274" r:id="rId19"/>
+    <p:sldId id="275" r:id="rId18"/>
+    <p:sldId id="276" r:id="rId19"/>
+    <p:sldId id="273" r:id="rId20"/>
+    <p:sldId id="274" r:id="rId21"/>
   </p:sldIdLst>
   <p:sldSz cx="12192000" cy="6858000"/>
   <p:notesSz cx="6858000" cy="9144000"/>
@@ -6824,7 +6826,7 @@
           <p:cNvPr id="2" name="Title 1">
             <a:extLst>
               <a:ext uri="{FF2B5EF4-FFF2-40B4-BE49-F238E27FC236}">
-                <a16:creationId xmlns:a16="http://schemas.microsoft.com/office/drawing/2014/main" id="{FAF6819F-D1D7-A035-566A-A84A52F43B8B}"/>
+                <a16:creationId xmlns:a16="http://schemas.microsoft.com/office/drawing/2014/main" id="{E39DADE0-449D-1E6E-A3AF-083379D6A2C8}"/>
               </a:ext>
             </a:extLst>
           </p:cNvPr>
@@ -6842,84 +6844,54 @@
           <a:p>
             <a:r>
               <a:rPr lang="ro-RO" dirty="0"/>
-              <a:t>Concluzii și îmbunătățiri</a:t>
+              <a:t>Aplicatie</a:t>
             </a:r>
             <a:endParaRPr lang="en-US" dirty="0"/>
           </a:p>
         </p:txBody>
       </p:sp>
-      <p:sp>
-        <p:nvSpPr>
-          <p:cNvPr id="3" name="Content Placeholder 2">
+      <p:pic>
+        <p:nvPicPr>
+          <p:cNvPr id="5" name="Content Placeholder 4">
             <a:extLst>
               <a:ext uri="{FF2B5EF4-FFF2-40B4-BE49-F238E27FC236}">
-                <a16:creationId xmlns:a16="http://schemas.microsoft.com/office/drawing/2014/main" id="{E1608426-2DB7-4B4A-4A69-E01E5E7A5989}"/>
+                <a16:creationId xmlns:a16="http://schemas.microsoft.com/office/drawing/2014/main" id="{8C310873-25A5-2421-B67E-FAECD51FD668}"/>
               </a:ext>
             </a:extLst>
           </p:cNvPr>
-          <p:cNvSpPr>
-            <a:spLocks noGrp="1"/>
-          </p:cNvSpPr>
+          <p:cNvPicPr>
+            <a:picLocks noGrp="1" noChangeAspect="1"/>
+          </p:cNvPicPr>
           <p:nvPr>
             <p:ph idx="1"/>
           </p:nvPr>
-        </p:nvSpPr>
-        <p:spPr/>
-        <p:txBody>
-          <a:bodyPr/>
-          <a:lstStyle/>
-          <a:p>
-            <a:r>
-              <a:rPr lang="ro-RO" dirty="0"/>
-              <a:t>Conform matricei de </a:t>
-            </a:r>
-            <a:r>
-              <a:rPr lang="ro-RO"/>
-              <a:t>confuzie a MLP-ului clasa </a:t>
-            </a:r>
-            <a:r>
-              <a:rPr lang="ro-RO" dirty="0"/>
-              <a:t>cu cea mai mică acuratețe este preferences, urmată de necessary. Acest lucru este dat de numărul mic de exemple din fiecare clasă comparativ cu restul. Acest lucru deja a deja parțial rezolvat prin adăugarea manuală și/sau automată de greutăți claselor.</a:t>
-            </a:r>
-          </a:p>
-          <a:p>
-            <a:endParaRPr lang="ro-RO" dirty="0"/>
-          </a:p>
-          <a:p>
-            <a:r>
-              <a:rPr lang="ro-RO" dirty="0"/>
-              <a:t>MLP Classifier este cel mai bun model actual cu o acuratețe</a:t>
-            </a:r>
-            <a:r>
-              <a:rPr lang="en-US" dirty="0"/>
-              <a:t> </a:t>
-            </a:r>
-            <a:r>
-              <a:rPr lang="en-US" dirty="0" err="1"/>
-              <a:t>medie</a:t>
-            </a:r>
-            <a:r>
-              <a:rPr lang="ro-RO" dirty="0"/>
-              <a:t> de 9</a:t>
-            </a:r>
-            <a:r>
-              <a:rPr lang="en-US" dirty="0"/>
-              <a:t>9.12</a:t>
-            </a:r>
-            <a:r>
-              <a:rPr lang="ro-RO" dirty="0"/>
-              <a:t>% însă se poate îmbunătăți prin mai multe date de antrenare sau implementând corect un Voting Classifier care să includă MLP-ul actual și 2 clasificatori binari care să se axeze doar pe cookie-uri necesare și preferențiale dat fiind imbalansul din clase.</a:t>
-            </a:r>
-          </a:p>
-          <a:p>
-            <a:endParaRPr lang="en-US" dirty="0"/>
-          </a:p>
-        </p:txBody>
-      </p:sp>
+        </p:nvPicPr>
+        <p:blipFill>
+          <a:blip r:embed="rId2">
+            <a:extLst>
+              <a:ext uri="{28A0092B-C50C-407E-A947-70E740481C1C}">
+                <a14:useLocalDpi xmlns:a14="http://schemas.microsoft.com/office/drawing/2010/main" val="0"/>
+              </a:ext>
+            </a:extLst>
+          </a:blip>
+          <a:stretch>
+            <a:fillRect/>
+          </a:stretch>
+        </p:blipFill>
+        <p:spPr>
+          <a:xfrm>
+            <a:off x="0" y="1315039"/>
+            <a:ext cx="9854152" cy="5542961"/>
+          </a:xfrm>
+          <a:prstGeom prst="rect">
+            <a:avLst/>
+          </a:prstGeom>
+        </p:spPr>
+      </p:pic>
     </p:spTree>
     <p:extLst>
       <p:ext uri="{BB962C8B-B14F-4D97-AF65-F5344CB8AC3E}">
-        <p14:creationId xmlns:p14="http://schemas.microsoft.com/office/powerpoint/2010/main" val="1848391234"/>
+        <p14:creationId xmlns:p14="http://schemas.microsoft.com/office/powerpoint/2010/main" val="3119650688"/>
       </p:ext>
     </p:extLst>
   </p:cSld>
@@ -6951,7 +6923,7 @@
           <p:cNvPr id="2" name="Title 1">
             <a:extLst>
               <a:ext uri="{FF2B5EF4-FFF2-40B4-BE49-F238E27FC236}">
-                <a16:creationId xmlns:a16="http://schemas.microsoft.com/office/drawing/2014/main" id="{A9FD76FE-8BE3-641F-C907-E18A997659DA}"/>
+                <a16:creationId xmlns:a16="http://schemas.microsoft.com/office/drawing/2014/main" id="{6AB834F2-0CB7-2585-5E7F-837096CDA6B1}"/>
               </a:ext>
             </a:extLst>
           </p:cNvPr>
@@ -6962,28 +6934,185 @@
             <p:ph type="title"/>
           </p:nvPr>
         </p:nvSpPr>
-        <p:spPr>
-          <a:xfrm>
-            <a:off x="564213" y="2692924"/>
-            <a:ext cx="8596668" cy="1320800"/>
-          </a:xfrm>
-        </p:spPr>
+        <p:spPr/>
         <p:txBody>
           <a:bodyPr/>
           <a:lstStyle/>
           <a:p>
             <a:r>
               <a:rPr lang="ro-RO" dirty="0"/>
-              <a:t>Mulțumesc pentru atenția acordată!</a:t>
+              <a:t>Descriere aplicație</a:t>
             </a:r>
             <a:endParaRPr lang="en-US" dirty="0"/>
+          </a:p>
+        </p:txBody>
+      </p:sp>
+      <p:sp>
+        <p:nvSpPr>
+          <p:cNvPr id="3" name="Content Placeholder 2">
+            <a:extLst>
+              <a:ext uri="{FF2B5EF4-FFF2-40B4-BE49-F238E27FC236}">
+                <a16:creationId xmlns:a16="http://schemas.microsoft.com/office/drawing/2014/main" id="{65C806DE-2049-8B9D-702C-E9825308912B}"/>
+              </a:ext>
+            </a:extLst>
+          </p:cNvPr>
+          <p:cNvSpPr>
+            <a:spLocks noGrp="1"/>
+          </p:cNvSpPr>
+          <p:nvPr>
+            <p:ph idx="1"/>
+          </p:nvPr>
+        </p:nvSpPr>
+        <p:spPr/>
+        <p:txBody>
+          <a:bodyPr/>
+          <a:lstStyle/>
+          <a:p>
+            <a:r>
+              <a:rPr lang="ro-RO" dirty="0"/>
+              <a:t>Dupa cum se poate obseva aplicația are un UI  foarte simplu și light, adecvat tuturor persoanelor. Prin aplicatie se poate activa/dezactiva ad-blocker-ul și de asemenea cookie blocker-ul (precum și selectarea tipurilor de cookie care utilizatorul dorește să le păstreze).</a:t>
+            </a:r>
+          </a:p>
+          <a:p>
+            <a:endParaRPr lang="ro-RO" dirty="0"/>
+          </a:p>
+          <a:p>
+            <a:r>
+              <a:rPr lang="ro-RO" dirty="0"/>
+              <a:t>Ad-blocker-ul funcționează setând IP-ul dispozitivului ca DNS și interceptând trafic pe care îl filtrează.</a:t>
+            </a:r>
+          </a:p>
+          <a:p>
+            <a:r>
+              <a:rPr lang="ro-RO" dirty="0"/>
+              <a:t>Cookie blocker-ul se folosește de modelul exportat prin ONNX pentru a clasifica și a respinge cookie-uri interceptate printr-un MITM (man in the middle attack) print setarea adresei IP ca host împreună cu un port ca și proxy precum și instalarea unui certificat pentru a putea naviga internetul fără a fi blocat.</a:t>
+            </a:r>
           </a:p>
         </p:txBody>
       </p:sp>
     </p:spTree>
     <p:extLst>
       <p:ext uri="{BB962C8B-B14F-4D97-AF65-F5344CB8AC3E}">
-        <p14:creationId xmlns:p14="http://schemas.microsoft.com/office/powerpoint/2010/main" val="1019873953"/>
+        <p14:creationId xmlns:p14="http://schemas.microsoft.com/office/powerpoint/2010/main" val="82793749"/>
+      </p:ext>
+    </p:extLst>
+  </p:cSld>
+  <p:clrMapOvr>
+    <a:masterClrMapping/>
+  </p:clrMapOvr>
+</p:sld>
+</file>
+
+<file path=ppt/slides/slide19.xml><?xml version="1.0" encoding="utf-8"?>
+<p:sld xmlns:a="http://schemas.openxmlformats.org/drawingml/2006/main" xmlns:r="http://schemas.openxmlformats.org/officeDocument/2006/relationships" xmlns:p="http://schemas.openxmlformats.org/presentationml/2006/main">
+  <p:cSld>
+    <p:spTree>
+      <p:nvGrpSpPr>
+        <p:cNvPr id="1" name=""/>
+        <p:cNvGrpSpPr/>
+        <p:nvPr/>
+      </p:nvGrpSpPr>
+      <p:grpSpPr>
+        <a:xfrm>
+          <a:off x="0" y="0"/>
+          <a:ext cx="0" cy="0"/>
+          <a:chOff x="0" y="0"/>
+          <a:chExt cx="0" cy="0"/>
+        </a:xfrm>
+      </p:grpSpPr>
+      <p:sp>
+        <p:nvSpPr>
+          <p:cNvPr id="2" name="Title 1">
+            <a:extLst>
+              <a:ext uri="{FF2B5EF4-FFF2-40B4-BE49-F238E27FC236}">
+                <a16:creationId xmlns:a16="http://schemas.microsoft.com/office/drawing/2014/main" id="{FAF6819F-D1D7-A035-566A-A84A52F43B8B}"/>
+              </a:ext>
+            </a:extLst>
+          </p:cNvPr>
+          <p:cNvSpPr>
+            <a:spLocks noGrp="1"/>
+          </p:cNvSpPr>
+          <p:nvPr>
+            <p:ph type="title"/>
+          </p:nvPr>
+        </p:nvSpPr>
+        <p:spPr/>
+        <p:txBody>
+          <a:bodyPr/>
+          <a:lstStyle/>
+          <a:p>
+            <a:r>
+              <a:rPr lang="ro-RO" dirty="0"/>
+              <a:t>Concluzii și îmbunătățiri</a:t>
+            </a:r>
+            <a:endParaRPr lang="en-US" dirty="0"/>
+          </a:p>
+        </p:txBody>
+      </p:sp>
+      <p:sp>
+        <p:nvSpPr>
+          <p:cNvPr id="3" name="Content Placeholder 2">
+            <a:extLst>
+              <a:ext uri="{FF2B5EF4-FFF2-40B4-BE49-F238E27FC236}">
+                <a16:creationId xmlns:a16="http://schemas.microsoft.com/office/drawing/2014/main" id="{E1608426-2DB7-4B4A-4A69-E01E5E7A5989}"/>
+              </a:ext>
+            </a:extLst>
+          </p:cNvPr>
+          <p:cNvSpPr>
+            <a:spLocks noGrp="1"/>
+          </p:cNvSpPr>
+          <p:nvPr>
+            <p:ph idx="1"/>
+          </p:nvPr>
+        </p:nvSpPr>
+        <p:spPr/>
+        <p:txBody>
+          <a:bodyPr/>
+          <a:lstStyle/>
+          <a:p>
+            <a:r>
+              <a:rPr lang="ro-RO" dirty="0"/>
+              <a:t>Conform matricei de confuzie a MLP-ului clasa cu cea mai mică acuratețe este preferences, urmată de necessary. Acest lucru este dat de numărul mic de exemple din fiecare clasă comparativ cu restul. Acest lucru deja a deja parțial rezolvat prin adăugarea manuală și/sau automată de greutăți claselor.</a:t>
+            </a:r>
+          </a:p>
+          <a:p>
+            <a:endParaRPr lang="ro-RO" dirty="0"/>
+          </a:p>
+          <a:p>
+            <a:r>
+              <a:rPr lang="ro-RO" dirty="0"/>
+              <a:t>MLP Classifier este cel mai bun model actual cu o acuratețe</a:t>
+            </a:r>
+            <a:r>
+              <a:rPr lang="en-US" dirty="0"/>
+              <a:t> </a:t>
+            </a:r>
+            <a:r>
+              <a:rPr lang="en-US" dirty="0" err="1"/>
+              <a:t>medie</a:t>
+            </a:r>
+            <a:r>
+              <a:rPr lang="ro-RO" dirty="0"/>
+              <a:t> de 9</a:t>
+            </a:r>
+            <a:r>
+              <a:rPr lang="en-US" dirty="0"/>
+              <a:t>9.12</a:t>
+            </a:r>
+            <a:r>
+              <a:rPr lang="ro-RO" dirty="0"/>
+              <a:t>% însă se poate îmbunătăți prin mai multe date de antrenare sau implementând corect un Voting Classifier care să includă MLP-ul actual și 2 clasificatori binari care să se axeze doar pe cookie-uri necesare și preferențiale dat fiind imbalansul din clase.</a:t>
+            </a:r>
+          </a:p>
+          <a:p>
+            <a:endParaRPr lang="en-US" dirty="0"/>
+          </a:p>
+        </p:txBody>
+      </p:sp>
+    </p:spTree>
+    <p:extLst>
+      <p:ext uri="{BB962C8B-B14F-4D97-AF65-F5344CB8AC3E}">
+        <p14:creationId xmlns:p14="http://schemas.microsoft.com/office/powerpoint/2010/main" val="1848391234"/>
       </p:ext>
     </p:extLst>
   </p:cSld>
@@ -7065,7 +7194,9 @@
         </p:nvSpPr>
         <p:spPr/>
         <p:txBody>
-          <a:bodyPr/>
+          <a:bodyPr>
+            <a:normAutofit fontScale="92500" lnSpcReduction="20000"/>
+          </a:bodyPr>
           <a:lstStyle/>
           <a:p>
             <a:r>
@@ -7226,6 +7357,18 @@
             <a:r>
               <a:rPr lang="ro-RO" dirty="0"/>
               <a:t>Rezultate</a:t>
+            </a:r>
+          </a:p>
+          <a:p>
+            <a:r>
+              <a:rPr lang="ro-RO" dirty="0"/>
+              <a:t>Aplicatie</a:t>
+            </a:r>
+          </a:p>
+          <a:p>
+            <a:r>
+              <a:rPr lang="ro-RO" dirty="0"/>
+              <a:t>Descriere aplicație</a:t>
             </a:r>
             <a:endParaRPr lang="en-US" dirty="0"/>
           </a:p>
@@ -7242,6 +7385,70 @@
     <p:extLst>
       <p:ext uri="{BB962C8B-B14F-4D97-AF65-F5344CB8AC3E}">
         <p14:creationId xmlns:p14="http://schemas.microsoft.com/office/powerpoint/2010/main" val="142047717"/>
+      </p:ext>
+    </p:extLst>
+  </p:cSld>
+  <p:clrMapOvr>
+    <a:masterClrMapping/>
+  </p:clrMapOvr>
+</p:sld>
+</file>
+
+<file path=ppt/slides/slide20.xml><?xml version="1.0" encoding="utf-8"?>
+<p:sld xmlns:a="http://schemas.openxmlformats.org/drawingml/2006/main" xmlns:r="http://schemas.openxmlformats.org/officeDocument/2006/relationships" xmlns:p="http://schemas.openxmlformats.org/presentationml/2006/main">
+  <p:cSld>
+    <p:spTree>
+      <p:nvGrpSpPr>
+        <p:cNvPr id="1" name=""/>
+        <p:cNvGrpSpPr/>
+        <p:nvPr/>
+      </p:nvGrpSpPr>
+      <p:grpSpPr>
+        <a:xfrm>
+          <a:off x="0" y="0"/>
+          <a:ext cx="0" cy="0"/>
+          <a:chOff x="0" y="0"/>
+          <a:chExt cx="0" cy="0"/>
+        </a:xfrm>
+      </p:grpSpPr>
+      <p:sp>
+        <p:nvSpPr>
+          <p:cNvPr id="2" name="Title 1">
+            <a:extLst>
+              <a:ext uri="{FF2B5EF4-FFF2-40B4-BE49-F238E27FC236}">
+                <a16:creationId xmlns:a16="http://schemas.microsoft.com/office/drawing/2014/main" id="{A9FD76FE-8BE3-641F-C907-E18A997659DA}"/>
+              </a:ext>
+            </a:extLst>
+          </p:cNvPr>
+          <p:cNvSpPr>
+            <a:spLocks noGrp="1"/>
+          </p:cNvSpPr>
+          <p:nvPr>
+            <p:ph type="title"/>
+          </p:nvPr>
+        </p:nvSpPr>
+        <p:spPr>
+          <a:xfrm>
+            <a:off x="564213" y="2692924"/>
+            <a:ext cx="8596668" cy="1320800"/>
+          </a:xfrm>
+        </p:spPr>
+        <p:txBody>
+          <a:bodyPr/>
+          <a:lstStyle/>
+          <a:p>
+            <a:r>
+              <a:rPr lang="ro-RO" dirty="0"/>
+              <a:t>Mulțumesc pentru atenția acordată!</a:t>
+            </a:r>
+            <a:endParaRPr lang="en-US" dirty="0"/>
+          </a:p>
+        </p:txBody>
+      </p:sp>
+    </p:spTree>
+    <p:extLst>
+      <p:ext uri="{BB962C8B-B14F-4D97-AF65-F5344CB8AC3E}">
+        <p14:creationId xmlns:p14="http://schemas.microsoft.com/office/powerpoint/2010/main" val="1019873953"/>
       </p:ext>
     </p:extLst>
   </p:cSld>

--- a/Presentation_Cookie_Classifier.pptx
+++ b/Presentation_Cookie_Classifier.pptx
@@ -8,23 +8,22 @@
     <p:sldId id="256" r:id="rId2"/>
     <p:sldId id="257" r:id="rId3"/>
     <p:sldId id="261" r:id="rId4"/>
-    <p:sldId id="263" r:id="rId5"/>
-    <p:sldId id="264" r:id="rId6"/>
-    <p:sldId id="258" r:id="rId7"/>
-    <p:sldId id="259" r:id="rId8"/>
-    <p:sldId id="260" r:id="rId9"/>
-    <p:sldId id="265" r:id="rId10"/>
-    <p:sldId id="266" r:id="rId11"/>
-    <p:sldId id="267" r:id="rId12"/>
-    <p:sldId id="268" r:id="rId13"/>
-    <p:sldId id="269" r:id="rId14"/>
-    <p:sldId id="270" r:id="rId15"/>
-    <p:sldId id="271" r:id="rId16"/>
-    <p:sldId id="272" r:id="rId17"/>
-    <p:sldId id="275" r:id="rId18"/>
-    <p:sldId id="276" r:id="rId19"/>
-    <p:sldId id="273" r:id="rId20"/>
-    <p:sldId id="274" r:id="rId21"/>
+    <p:sldId id="264" r:id="rId5"/>
+    <p:sldId id="258" r:id="rId6"/>
+    <p:sldId id="259" r:id="rId7"/>
+    <p:sldId id="260" r:id="rId8"/>
+    <p:sldId id="265" r:id="rId9"/>
+    <p:sldId id="266" r:id="rId10"/>
+    <p:sldId id="267" r:id="rId11"/>
+    <p:sldId id="268" r:id="rId12"/>
+    <p:sldId id="269" r:id="rId13"/>
+    <p:sldId id="270" r:id="rId14"/>
+    <p:sldId id="271" r:id="rId15"/>
+    <p:sldId id="272" r:id="rId16"/>
+    <p:sldId id="275" r:id="rId17"/>
+    <p:sldId id="276" r:id="rId18"/>
+    <p:sldId id="273" r:id="rId19"/>
+    <p:sldId id="274" r:id="rId20"/>
   </p:sldIdLst>
   <p:sldSz cx="12192000" cy="6858000"/>
   <p:notesSz cx="6858000" cy="9144000"/>
@@ -855,7 +854,7 @@
           <a:p>
             <a:fld id="{C7AA466E-39B5-4C10-B600-8A7969289383}" type="datetimeFigureOut">
               <a:rPr lang="en-US" smtClean="0"/>
-              <a:t>5/6/2026</a:t>
+              <a:t>6/3/2026</a:t>
             </a:fld>
             <a:endParaRPr lang="en-US"/>
           </a:p>
@@ -1106,7 +1105,7 @@
           <a:p>
             <a:fld id="{C7AA466E-39B5-4C10-B600-8A7969289383}" type="datetimeFigureOut">
               <a:rPr lang="en-US" smtClean="0"/>
-              <a:t>5/6/2026</a:t>
+              <a:t>6/3/2026</a:t>
             </a:fld>
             <a:endParaRPr lang="en-US"/>
           </a:p>
@@ -1420,7 +1419,7 @@
           <a:p>
             <a:fld id="{C7AA466E-39B5-4C10-B600-8A7969289383}" type="datetimeFigureOut">
               <a:rPr lang="en-US" smtClean="0"/>
-              <a:t>5/6/2026</a:t>
+              <a:t>6/3/2026</a:t>
             </a:fld>
             <a:endParaRPr lang="en-US"/>
           </a:p>
@@ -1747,7 +1746,7 @@
           <a:p>
             <a:fld id="{C7AA466E-39B5-4C10-B600-8A7969289383}" type="datetimeFigureOut">
               <a:rPr lang="en-US" smtClean="0"/>
-              <a:t>5/6/2026</a:t>
+              <a:t>6/3/2026</a:t>
             </a:fld>
             <a:endParaRPr lang="en-US"/>
           </a:p>
@@ -2061,7 +2060,7 @@
           <a:p>
             <a:fld id="{C7AA466E-39B5-4C10-B600-8A7969289383}" type="datetimeFigureOut">
               <a:rPr lang="en-US" smtClean="0"/>
-              <a:t>5/6/2026</a:t>
+              <a:t>6/3/2026</a:t>
             </a:fld>
             <a:endParaRPr lang="en-US"/>
           </a:p>
@@ -2448,7 +2447,7 @@
           <a:p>
             <a:fld id="{C7AA466E-39B5-4C10-B600-8A7969289383}" type="datetimeFigureOut">
               <a:rPr lang="en-US" smtClean="0"/>
-              <a:t>5/6/2026</a:t>
+              <a:t>6/3/2026</a:t>
             </a:fld>
             <a:endParaRPr lang="en-US"/>
           </a:p>
@@ -2618,7 +2617,7 @@
           <a:p>
             <a:fld id="{C7AA466E-39B5-4C10-B600-8A7969289383}" type="datetimeFigureOut">
               <a:rPr lang="en-US" smtClean="0"/>
-              <a:t>5/6/2026</a:t>
+              <a:t>6/3/2026</a:t>
             </a:fld>
             <a:endParaRPr lang="en-US"/>
           </a:p>
@@ -2798,7 +2797,7 @@
           <a:p>
             <a:fld id="{C7AA466E-39B5-4C10-B600-8A7969289383}" type="datetimeFigureOut">
               <a:rPr lang="en-US" smtClean="0"/>
-              <a:t>5/6/2026</a:t>
+              <a:t>6/3/2026</a:t>
             </a:fld>
             <a:endParaRPr lang="en-US"/>
           </a:p>
@@ -2974,7 +2973,7 @@
           <a:p>
             <a:fld id="{C7AA466E-39B5-4C10-B600-8A7969289383}" type="datetimeFigureOut">
               <a:rPr lang="en-US" smtClean="0"/>
-              <a:t>5/6/2026</a:t>
+              <a:t>6/3/2026</a:t>
             </a:fld>
             <a:endParaRPr lang="en-US"/>
           </a:p>
@@ -3221,7 +3220,7 @@
           <a:p>
             <a:fld id="{C7AA466E-39B5-4C10-B600-8A7969289383}" type="datetimeFigureOut">
               <a:rPr lang="en-US" smtClean="0"/>
-              <a:t>5/6/2026</a:t>
+              <a:t>6/3/2026</a:t>
             </a:fld>
             <a:endParaRPr lang="en-US"/>
           </a:p>
@@ -3453,7 +3452,7 @@
           <a:p>
             <a:fld id="{C7AA466E-39B5-4C10-B600-8A7969289383}" type="datetimeFigureOut">
               <a:rPr lang="en-US" smtClean="0"/>
-              <a:t>5/6/2026</a:t>
+              <a:t>6/3/2026</a:t>
             </a:fld>
             <a:endParaRPr lang="en-US"/>
           </a:p>
@@ -3827,7 +3826,7 @@
           <a:p>
             <a:fld id="{C7AA466E-39B5-4C10-B600-8A7969289383}" type="datetimeFigureOut">
               <a:rPr lang="en-US" smtClean="0"/>
-              <a:t>5/6/2026</a:t>
+              <a:t>6/3/2026</a:t>
             </a:fld>
             <a:endParaRPr lang="en-US"/>
           </a:p>
@@ -3950,7 +3949,7 @@
           <a:p>
             <a:fld id="{C7AA466E-39B5-4C10-B600-8A7969289383}" type="datetimeFigureOut">
               <a:rPr lang="en-US" smtClean="0"/>
-              <a:t>5/6/2026</a:t>
+              <a:t>6/3/2026</a:t>
             </a:fld>
             <a:endParaRPr lang="en-US"/>
           </a:p>
@@ -4045,7 +4044,7 @@
           <a:p>
             <a:fld id="{C7AA466E-39B5-4C10-B600-8A7969289383}" type="datetimeFigureOut">
               <a:rPr lang="en-US" smtClean="0"/>
-              <a:t>5/6/2026</a:t>
+              <a:t>6/3/2026</a:t>
             </a:fld>
             <a:endParaRPr lang="en-US"/>
           </a:p>
@@ -4300,7 +4299,7 @@
           <a:p>
             <a:fld id="{C7AA466E-39B5-4C10-B600-8A7969289383}" type="datetimeFigureOut">
               <a:rPr lang="en-US" smtClean="0"/>
-              <a:t>5/6/2026</a:t>
+              <a:t>6/3/2026</a:t>
             </a:fld>
             <a:endParaRPr lang="en-US"/>
           </a:p>
@@ -4563,7 +4562,7 @@
           <a:p>
             <a:fld id="{C7AA466E-39B5-4C10-B600-8A7969289383}" type="datetimeFigureOut">
               <a:rPr lang="en-US" smtClean="0"/>
-              <a:t>5/6/2026</a:t>
+              <a:t>6/3/2026</a:t>
             </a:fld>
             <a:endParaRPr lang="en-US"/>
           </a:p>
@@ -5308,7 +5307,7 @@
           <a:p>
             <a:fld id="{C7AA466E-39B5-4C10-B600-8A7969289383}" type="datetimeFigureOut">
               <a:rPr lang="en-US" smtClean="0"/>
-              <a:t>5/6/2026</a:t>
+              <a:t>6/3/2026</a:t>
             </a:fld>
             <a:endParaRPr lang="en-US"/>
           </a:p>
@@ -5918,103 +5917,6 @@
           <a:chExt cx="0" cy="0"/>
         </a:xfrm>
       </p:grpSpPr>
-      <p:sp>
-        <p:nvSpPr>
-          <p:cNvPr id="2" name="Title 1">
-            <a:extLst>
-              <a:ext uri="{FF2B5EF4-FFF2-40B4-BE49-F238E27FC236}">
-                <a16:creationId xmlns:a16="http://schemas.microsoft.com/office/drawing/2014/main" id="{8C5E2877-1CD7-DAC1-C84C-9FB856A59238}"/>
-              </a:ext>
-            </a:extLst>
-          </p:cNvPr>
-          <p:cNvSpPr>
-            <a:spLocks noGrp="1"/>
-          </p:cNvSpPr>
-          <p:nvPr>
-            <p:ph type="title"/>
-          </p:nvPr>
-        </p:nvSpPr>
-        <p:spPr/>
-        <p:txBody>
-          <a:bodyPr/>
-          <a:lstStyle/>
-          <a:p>
-            <a:r>
-              <a:rPr lang="ro-RO" dirty="0"/>
-              <a:t>Data Distribution</a:t>
-            </a:r>
-            <a:endParaRPr lang="en-US" dirty="0"/>
-          </a:p>
-        </p:txBody>
-      </p:sp>
-      <p:pic>
-        <p:nvPicPr>
-          <p:cNvPr id="5" name="Content Placeholder 4">
-            <a:extLst>
-              <a:ext uri="{FF2B5EF4-FFF2-40B4-BE49-F238E27FC236}">
-                <a16:creationId xmlns:a16="http://schemas.microsoft.com/office/drawing/2014/main" id="{DC2734F6-9E4B-1E80-B964-9EB730D042A6}"/>
-              </a:ext>
-            </a:extLst>
-          </p:cNvPr>
-          <p:cNvPicPr>
-            <a:picLocks noGrp="1" noChangeAspect="1"/>
-          </p:cNvPicPr>
-          <p:nvPr>
-            <p:ph idx="1"/>
-          </p:nvPr>
-        </p:nvPicPr>
-        <p:blipFill>
-          <a:blip r:embed="rId2">
-            <a:extLst>
-              <a:ext uri="{28A0092B-C50C-407E-A947-70E740481C1C}">
-                <a14:useLocalDpi xmlns:a14="http://schemas.microsoft.com/office/drawing/2010/main" val="0"/>
-              </a:ext>
-            </a:extLst>
-          </a:blip>
-          <a:stretch>
-            <a:fillRect/>
-          </a:stretch>
-        </p:blipFill>
-        <p:spPr>
-          <a:xfrm>
-            <a:off x="53934" y="1640264"/>
-            <a:ext cx="8803522" cy="4732256"/>
-          </a:xfrm>
-          <a:prstGeom prst="rect">
-            <a:avLst/>
-          </a:prstGeom>
-        </p:spPr>
-      </p:pic>
-    </p:spTree>
-    <p:extLst>
-      <p:ext uri="{BB962C8B-B14F-4D97-AF65-F5344CB8AC3E}">
-        <p14:creationId xmlns:p14="http://schemas.microsoft.com/office/powerpoint/2010/main" val="3781320747"/>
-      </p:ext>
-    </p:extLst>
-  </p:cSld>
-  <p:clrMapOvr>
-    <a:masterClrMapping/>
-  </p:clrMapOvr>
-</p:sld>
-</file>
-
-<file path=ppt/slides/slide11.xml><?xml version="1.0" encoding="utf-8"?>
-<p:sld xmlns:a="http://schemas.openxmlformats.org/drawingml/2006/main" xmlns:r="http://schemas.openxmlformats.org/officeDocument/2006/relationships" xmlns:p="http://schemas.openxmlformats.org/presentationml/2006/main">
-  <p:cSld>
-    <p:spTree>
-      <p:nvGrpSpPr>
-        <p:cNvPr id="1" name=""/>
-        <p:cNvGrpSpPr/>
-        <p:nvPr/>
-      </p:nvGrpSpPr>
-      <p:grpSpPr>
-        <a:xfrm>
-          <a:off x="0" y="0"/>
-          <a:ext cx="0" cy="0"/>
-          <a:chOff x="0" y="0"/>
-          <a:chExt cx="0" cy="0"/>
-        </a:xfrm>
-      </p:grpSpPr>
       <p:pic>
         <p:nvPicPr>
           <p:cNvPr id="3" name="Picture 2">
@@ -6064,7 +5966,7 @@
 </p:sld>
 </file>
 
-<file path=ppt/slides/slide12.xml><?xml version="1.0" encoding="utf-8"?>
+<file path=ppt/slides/slide11.xml><?xml version="1.0" encoding="utf-8"?>
 <p:sld xmlns:a="http://schemas.openxmlformats.org/drawingml/2006/main" xmlns:r="http://schemas.openxmlformats.org/officeDocument/2006/relationships" xmlns:p="http://schemas.openxmlformats.org/presentationml/2006/main">
   <p:cSld>
     <p:spTree>
@@ -6130,7 +6032,7 @@
 </p:sld>
 </file>
 
-<file path=ppt/slides/slide13.xml><?xml version="1.0" encoding="utf-8"?>
+<file path=ppt/slides/slide12.xml><?xml version="1.0" encoding="utf-8"?>
 <p:sld xmlns:a="http://schemas.openxmlformats.org/drawingml/2006/main" xmlns:r="http://schemas.openxmlformats.org/officeDocument/2006/relationships" xmlns:p="http://schemas.openxmlformats.org/presentationml/2006/main">
   <p:cSld>
     <p:spTree>
@@ -6228,7 +6130,7 @@
 </p:sld>
 </file>
 
-<file path=ppt/slides/slide14.xml><?xml version="1.0" encoding="utf-8"?>
+<file path=ppt/slides/slide13.xml><?xml version="1.0" encoding="utf-8"?>
 <p:sld xmlns:a="http://schemas.openxmlformats.org/drawingml/2006/main" xmlns:r="http://schemas.openxmlformats.org/officeDocument/2006/relationships" xmlns:p="http://schemas.openxmlformats.org/presentationml/2006/main">
   <p:cSld>
     <p:spTree>
@@ -6294,7 +6196,7 @@
 </p:sld>
 </file>
 
-<file path=ppt/slides/slide15.xml><?xml version="1.0" encoding="utf-8"?>
+<file path=ppt/slides/slide14.xml><?xml version="1.0" encoding="utf-8"?>
 <p:sld xmlns:a="http://schemas.openxmlformats.org/drawingml/2006/main" xmlns:r="http://schemas.openxmlformats.org/officeDocument/2006/relationships" xmlns:p="http://schemas.openxmlformats.org/presentationml/2006/main">
   <p:cSld>
     <p:spTree>
@@ -6738,7 +6640,7 @@
 </p:sld>
 </file>
 
-<file path=ppt/slides/slide16.xml><?xml version="1.0" encoding="utf-8"?>
+<file path=ppt/slides/slide15.xml><?xml version="1.0" encoding="utf-8"?>
 <p:sld xmlns:a="http://schemas.openxmlformats.org/drawingml/2006/main" xmlns:r="http://schemas.openxmlformats.org/officeDocument/2006/relationships" xmlns:p="http://schemas.openxmlformats.org/presentationml/2006/main">
   <p:cSld>
     <p:spTree>
@@ -6804,7 +6706,7 @@
 </p:sld>
 </file>
 
-<file path=ppt/slides/slide17.xml><?xml version="1.0" encoding="utf-8"?>
+<file path=ppt/slides/slide16.xml><?xml version="1.0" encoding="utf-8"?>
 <p:sld xmlns:a="http://schemas.openxmlformats.org/drawingml/2006/main" xmlns:r="http://schemas.openxmlformats.org/officeDocument/2006/relationships" xmlns:p="http://schemas.openxmlformats.org/presentationml/2006/main">
   <p:cSld>
     <p:spTree>
@@ -6901,7 +6803,7 @@
 </p:sld>
 </file>
 
-<file path=ppt/slides/slide18.xml><?xml version="1.0" encoding="utf-8"?>
+<file path=ppt/slides/slide17.xml><?xml version="1.0" encoding="utf-8"?>
 <p:sld xmlns:a="http://schemas.openxmlformats.org/drawingml/2006/main" xmlns:r="http://schemas.openxmlformats.org/officeDocument/2006/relationships" xmlns:p="http://schemas.openxmlformats.org/presentationml/2006/main">
   <p:cSld>
     <p:spTree>
@@ -7003,7 +6905,7 @@
 </p:sld>
 </file>
 
-<file path=ppt/slides/slide19.xml><?xml version="1.0" encoding="utf-8"?>
+<file path=ppt/slides/slide18.xml><?xml version="1.0" encoding="utf-8"?>
 <p:sld xmlns:a="http://schemas.openxmlformats.org/drawingml/2006/main" xmlns:r="http://schemas.openxmlformats.org/officeDocument/2006/relationships" xmlns:p="http://schemas.openxmlformats.org/presentationml/2006/main">
   <p:cSld>
     <p:spTree>
@@ -7071,41 +6973,526 @@
           <a:lstStyle/>
           <a:p>
             <a:r>
-              <a:rPr lang="ro-RO" dirty="0"/>
-              <a:t>Conform matricei de confuzie a MLP-ului clasa cu cea mai mică acuratețe este preferences, urmată de necessary. Acest lucru este dat de numărul mic de exemple din fiecare clasă comparativ cu restul. Acest lucru deja a deja parțial rezolvat prin adăugarea manuală și/sau automată de greutăți claselor.</a:t>
-            </a:r>
-          </a:p>
-          <a:p>
-            <a:endParaRPr lang="ro-RO" dirty="0"/>
-          </a:p>
-          <a:p>
-            <a:r>
-              <a:rPr lang="ro-RO" dirty="0"/>
-              <a:t>MLP Classifier este cel mai bun model actual cu o acuratețe</a:t>
-            </a:r>
-            <a:r>
-              <a:rPr lang="en-US" dirty="0"/>
-              <a:t> </a:t>
-            </a:r>
-            <a:r>
-              <a:rPr lang="en-US" dirty="0" err="1"/>
-              <a:t>medie</a:t>
-            </a:r>
-            <a:r>
-              <a:rPr lang="ro-RO" dirty="0"/>
-              <a:t> de 9</a:t>
-            </a:r>
-            <a:r>
-              <a:rPr lang="en-US" dirty="0"/>
-              <a:t>9.12</a:t>
-            </a:r>
-            <a:r>
-              <a:rPr lang="ro-RO" dirty="0"/>
-              <a:t>% însă se poate îmbunătăți prin mai multe date de antrenare sau implementând corect un Voting Classifier care să includă MLP-ul actual și 2 clasificatori binari care să se axeze doar pe cookie-uri necesare și preferențiale dat fiind imbalansul din clase.</a:t>
+              <a:rPr lang="en-US" dirty="0" err="1"/>
+              <a:t>Această</a:t>
+            </a:r>
+            <a:r>
+              <a:rPr lang="en-US" dirty="0"/>
+              <a:t> </a:t>
+            </a:r>
+            <a:r>
+              <a:rPr lang="en-US" dirty="0" err="1"/>
+              <a:t>lucrare</a:t>
+            </a:r>
+            <a:r>
+              <a:rPr lang="en-US" dirty="0"/>
+              <a:t> </a:t>
+            </a:r>
+            <a:r>
+              <a:rPr lang="en-US" dirty="0" err="1"/>
+              <a:t>prezintă</a:t>
+            </a:r>
+            <a:r>
+              <a:rPr lang="en-US" dirty="0"/>
+              <a:t> </a:t>
+            </a:r>
+            <a:r>
+              <a:rPr lang="en-US" dirty="0" err="1"/>
+              <a:t>proiectarea</a:t>
+            </a:r>
+            <a:r>
+              <a:rPr lang="en-US" dirty="0"/>
+              <a:t> </a:t>
+            </a:r>
+            <a:r>
+              <a:rPr lang="en-US" dirty="0" err="1"/>
+              <a:t>și</a:t>
+            </a:r>
+            <a:r>
+              <a:rPr lang="en-US" dirty="0"/>
+              <a:t> </a:t>
+            </a:r>
+            <a:r>
+              <a:rPr lang="en-US" dirty="0" err="1"/>
+              <a:t>implementarea</a:t>
+            </a:r>
+            <a:r>
+              <a:rPr lang="en-US" dirty="0"/>
+              <a:t> </a:t>
+            </a:r>
+            <a:r>
+              <a:rPr lang="en-US" dirty="0" err="1"/>
+              <a:t>unui</a:t>
+            </a:r>
+            <a:r>
+              <a:rPr lang="en-US" dirty="0"/>
+              <a:t> </a:t>
+            </a:r>
+            <a:r>
+              <a:rPr lang="en-US" dirty="0" err="1"/>
+              <a:t>sistem</a:t>
+            </a:r>
+            <a:r>
+              <a:rPr lang="en-US" dirty="0"/>
+              <a:t> </a:t>
+            </a:r>
+            <a:r>
+              <a:rPr lang="en-US" dirty="0" err="1"/>
+              <a:t>complet</a:t>
+            </a:r>
+            <a:r>
+              <a:rPr lang="en-US" dirty="0"/>
+              <a:t> </a:t>
+            </a:r>
+            <a:r>
+              <a:rPr lang="en-US" dirty="0" err="1"/>
+              <a:t>și</a:t>
+            </a:r>
+            <a:r>
+              <a:rPr lang="en-US" dirty="0"/>
+              <a:t> </a:t>
+            </a:r>
+            <a:r>
+              <a:rPr lang="en-US" dirty="0" err="1"/>
+              <a:t>inovator</a:t>
+            </a:r>
+            <a:r>
+              <a:rPr lang="en-US" dirty="0"/>
+              <a:t> </a:t>
+            </a:r>
+            <a:r>
+              <a:rPr lang="en-US" dirty="0" err="1"/>
+              <a:t>pentru</a:t>
+            </a:r>
+            <a:r>
+              <a:rPr lang="en-US" dirty="0"/>
+              <a:t> </a:t>
+            </a:r>
+            <a:r>
+              <a:rPr lang="en-US" dirty="0" err="1"/>
+              <a:t>clasificarea</a:t>
+            </a:r>
+            <a:r>
+              <a:rPr lang="en-US" dirty="0"/>
+              <a:t> </a:t>
+            </a:r>
+            <a:r>
+              <a:rPr lang="en-US" dirty="0" err="1"/>
+              <a:t>și</a:t>
+            </a:r>
+            <a:r>
+              <a:rPr lang="en-US" dirty="0"/>
+              <a:t> </a:t>
+            </a:r>
+            <a:r>
+              <a:rPr lang="en-US" dirty="0" err="1"/>
+              <a:t>blocarea</a:t>
+            </a:r>
+            <a:r>
+              <a:rPr lang="en-US" dirty="0"/>
+              <a:t> cookie-</a:t>
+            </a:r>
+            <a:r>
+              <a:rPr lang="en-US" dirty="0" err="1"/>
+              <a:t>urilor</a:t>
+            </a:r>
+            <a:r>
+              <a:rPr lang="en-US" dirty="0"/>
+              <a:t>, </a:t>
+            </a:r>
+            <a:r>
+              <a:rPr lang="en-US" dirty="0" err="1"/>
+              <a:t>integrat</a:t>
+            </a:r>
+            <a:r>
+              <a:rPr lang="en-US" dirty="0"/>
+              <a:t> cu </a:t>
+            </a:r>
+            <a:r>
+              <a:rPr lang="en-US" dirty="0" err="1"/>
+              <a:t>filtrarea</a:t>
+            </a:r>
+            <a:r>
+              <a:rPr lang="en-US" dirty="0"/>
+              <a:t> la </a:t>
+            </a:r>
+            <a:r>
+              <a:rPr lang="en-US" dirty="0" err="1"/>
+              <a:t>nivel</a:t>
+            </a:r>
+            <a:r>
+              <a:rPr lang="en-US" dirty="0"/>
+              <a:t> DNS a adware-</a:t>
+            </a:r>
+            <a:r>
+              <a:rPr lang="en-US" dirty="0" err="1"/>
+              <a:t>ului</a:t>
+            </a:r>
+            <a:r>
+              <a:rPr lang="en-US" dirty="0"/>
+              <a:t> </a:t>
+            </a:r>
+            <a:r>
+              <a:rPr lang="en-US" dirty="0" err="1"/>
+              <a:t>și</a:t>
+            </a:r>
+            <a:r>
+              <a:rPr lang="en-US" dirty="0"/>
+              <a:t> malware-</a:t>
+            </a:r>
+            <a:r>
+              <a:rPr lang="en-US" dirty="0" err="1"/>
+              <a:t>ului</a:t>
+            </a:r>
+            <a:r>
+              <a:rPr lang="en-US" dirty="0"/>
+              <a:t>, </a:t>
+            </a:r>
+            <a:r>
+              <a:rPr lang="en-US" dirty="0" err="1"/>
+              <a:t>reprezentând</a:t>
+            </a:r>
+            <a:r>
+              <a:rPr lang="en-US" dirty="0"/>
+              <a:t> o </a:t>
+            </a:r>
+            <a:r>
+              <a:rPr lang="en-US" dirty="0" err="1"/>
+              <a:t>abordare</a:t>
+            </a:r>
+            <a:r>
+              <a:rPr lang="en-US" dirty="0"/>
+              <a:t> </a:t>
+            </a:r>
+            <a:r>
+              <a:rPr lang="en-US" dirty="0" err="1"/>
+              <a:t>modernă</a:t>
+            </a:r>
+            <a:r>
+              <a:rPr lang="en-US" dirty="0"/>
+              <a:t>, </a:t>
+            </a:r>
+            <a:r>
+              <a:rPr lang="en-US" dirty="0" err="1"/>
+              <a:t>aliniată</a:t>
+            </a:r>
+            <a:r>
+              <a:rPr lang="en-US" dirty="0"/>
+              <a:t> la </a:t>
+            </a:r>
+            <a:r>
+              <a:rPr lang="en-US" dirty="0" err="1"/>
+              <a:t>cele</a:t>
+            </a:r>
+            <a:r>
+              <a:rPr lang="en-US" dirty="0"/>
+              <a:t> </a:t>
+            </a:r>
+            <a:r>
+              <a:rPr lang="en-US" dirty="0" err="1"/>
+              <a:t>mai</a:t>
+            </a:r>
+            <a:r>
+              <a:rPr lang="en-US" dirty="0"/>
+              <a:t> </a:t>
+            </a:r>
+            <a:r>
+              <a:rPr lang="en-US" dirty="0" err="1"/>
+              <a:t>recente</a:t>
+            </a:r>
+            <a:r>
+              <a:rPr lang="en-US" dirty="0"/>
+              <a:t> </a:t>
+            </a:r>
+            <a:r>
+              <a:rPr lang="en-US" dirty="0" err="1"/>
+              <a:t>direcții</a:t>
+            </a:r>
+            <a:r>
+              <a:rPr lang="en-US" dirty="0"/>
+              <a:t> de </a:t>
+            </a:r>
+            <a:r>
+              <a:rPr lang="en-US" dirty="0" err="1"/>
+              <a:t>cercetare</a:t>
+            </a:r>
+            <a:r>
+              <a:rPr lang="en-US" dirty="0"/>
+              <a:t> </a:t>
+            </a:r>
+            <a:r>
+              <a:rPr lang="en-US" dirty="0" err="1"/>
+              <a:t>și</a:t>
+            </a:r>
+            <a:r>
+              <a:rPr lang="en-US" dirty="0"/>
+              <a:t> </a:t>
+            </a:r>
+            <a:r>
+              <a:rPr lang="en-US" dirty="0" err="1"/>
+              <a:t>tehnologii</a:t>
+            </a:r>
+            <a:r>
+              <a:rPr lang="en-US" dirty="0"/>
+              <a:t> din </a:t>
+            </a:r>
+            <a:r>
+              <a:rPr lang="en-US" dirty="0" err="1"/>
+              <a:t>domeniu</a:t>
+            </a:r>
+            <a:r>
+              <a:rPr lang="en-US" dirty="0"/>
+              <a:t> (state-of-the-art).</a:t>
             </a:r>
           </a:p>
           <a:p>
             <a:endParaRPr lang="en-US" dirty="0"/>
+          </a:p>
+          <a:p>
+            <a:r>
+              <a:rPr lang="en-US" dirty="0"/>
+              <a:t>Sunt </a:t>
+            </a:r>
+            <a:r>
+              <a:rPr lang="en-US" dirty="0" err="1"/>
+              <a:t>vizate</a:t>
+            </a:r>
+            <a:r>
+              <a:rPr lang="en-US" dirty="0"/>
+              <a:t> </a:t>
+            </a:r>
+            <a:r>
+              <a:rPr lang="en-US" dirty="0" err="1"/>
+              <a:t>două</a:t>
+            </a:r>
+            <a:r>
+              <a:rPr lang="en-US" dirty="0"/>
+              <a:t> </a:t>
+            </a:r>
+            <a:r>
+              <a:rPr lang="en-US" dirty="0" err="1"/>
+              <a:t>direcții</a:t>
+            </a:r>
+            <a:r>
+              <a:rPr lang="en-US" dirty="0"/>
+              <a:t> de </a:t>
+            </a:r>
+            <a:r>
+              <a:rPr lang="en-US" dirty="0" err="1"/>
+              <a:t>îmbunătățire</a:t>
+            </a:r>
+            <a:r>
+              <a:rPr lang="en-US" dirty="0"/>
+              <a:t>: </a:t>
+            </a:r>
+            <a:r>
+              <a:rPr lang="en-US" dirty="0" err="1"/>
+              <a:t>optimizarea</a:t>
+            </a:r>
+            <a:r>
+              <a:rPr lang="en-US" dirty="0"/>
+              <a:t> </a:t>
+            </a:r>
+            <a:r>
+              <a:rPr lang="en-US" dirty="0" err="1"/>
+              <a:t>datelor</a:t>
+            </a:r>
+            <a:r>
+              <a:rPr lang="en-US" dirty="0"/>
+              <a:t> de </a:t>
+            </a:r>
+            <a:r>
+              <a:rPr lang="en-US" dirty="0" err="1"/>
+              <a:t>antrenare</a:t>
+            </a:r>
+            <a:r>
+              <a:rPr lang="en-US" dirty="0"/>
+              <a:t> </a:t>
+            </a:r>
+            <a:r>
+              <a:rPr lang="en-US" dirty="0" err="1"/>
+              <a:t>pentru</a:t>
+            </a:r>
+            <a:r>
+              <a:rPr lang="en-US" dirty="0"/>
+              <a:t> </a:t>
+            </a:r>
+            <a:r>
+              <a:rPr lang="en-US" dirty="0" err="1"/>
+              <a:t>performanță</a:t>
+            </a:r>
+            <a:r>
+              <a:rPr lang="en-US" dirty="0"/>
+              <a:t> </a:t>
+            </a:r>
+            <a:r>
+              <a:rPr lang="en-US" dirty="0" err="1"/>
+              <a:t>mai</a:t>
+            </a:r>
+            <a:r>
+              <a:rPr lang="en-US" dirty="0"/>
+              <a:t> </a:t>
+            </a:r>
+            <a:r>
+              <a:rPr lang="en-US" dirty="0" err="1"/>
+              <a:t>bună</a:t>
+            </a:r>
+            <a:r>
+              <a:rPr lang="en-US" dirty="0"/>
+              <a:t> a </a:t>
+            </a:r>
+            <a:r>
+              <a:rPr lang="en-US" dirty="0" err="1"/>
+              <a:t>modelului</a:t>
+            </a:r>
+            <a:r>
+              <a:rPr lang="en-US" dirty="0"/>
+              <a:t>, fine-</a:t>
+            </a:r>
+            <a:r>
+              <a:rPr lang="en-US" dirty="0" err="1"/>
+              <a:t>tunarea</a:t>
+            </a:r>
+            <a:r>
+              <a:rPr lang="en-US" dirty="0"/>
+              <a:t> </a:t>
+            </a:r>
+            <a:r>
+              <a:rPr lang="en-US" dirty="0" err="1"/>
+              <a:t>acestuia</a:t>
+            </a:r>
+            <a:r>
+              <a:rPr lang="en-US" dirty="0"/>
+              <a:t> </a:t>
+            </a:r>
+            <a:r>
+              <a:rPr lang="en-US" dirty="0" err="1"/>
+              <a:t>și</a:t>
+            </a:r>
+            <a:r>
+              <a:rPr lang="en-US" dirty="0"/>
+              <a:t> </a:t>
+            </a:r>
+            <a:r>
+              <a:rPr lang="en-US" dirty="0" err="1"/>
+              <a:t>extinderea</a:t>
+            </a:r>
+            <a:r>
+              <a:rPr lang="en-US" dirty="0"/>
+              <a:t> </a:t>
+            </a:r>
+            <a:r>
+              <a:rPr lang="en-US" dirty="0" err="1"/>
+              <a:t>filtrării</a:t>
+            </a:r>
+            <a:r>
+              <a:rPr lang="en-US" dirty="0"/>
+              <a:t> DNS </a:t>
+            </a:r>
+            <a:r>
+              <a:rPr lang="en-US" dirty="0" err="1"/>
+              <a:t>prin</a:t>
+            </a:r>
+            <a:r>
+              <a:rPr lang="en-US" dirty="0"/>
+              <a:t> </a:t>
+            </a:r>
+            <a:r>
+              <a:rPr lang="en-US" dirty="0" err="1"/>
+              <a:t>liste</a:t>
+            </a:r>
+            <a:r>
+              <a:rPr lang="en-US" dirty="0"/>
+              <a:t> </a:t>
+            </a:r>
+            <a:r>
+              <a:rPr lang="en-US" dirty="0" err="1"/>
+              <a:t>suplimentare</a:t>
+            </a:r>
+            <a:r>
+              <a:rPr lang="en-US" dirty="0"/>
+              <a:t> de </a:t>
+            </a:r>
+            <a:r>
+              <a:rPr lang="en-US" dirty="0" err="1"/>
+              <a:t>blocare</a:t>
+            </a:r>
+            <a:r>
+              <a:rPr lang="en-US" dirty="0"/>
+              <a:t> pe </a:t>
+            </a:r>
+            <a:r>
+              <a:rPr lang="en-US" dirty="0" err="1"/>
+              <a:t>categorii</a:t>
+            </a:r>
+            <a:r>
+              <a:rPr lang="en-US" dirty="0"/>
+              <a:t> (fake news, gambling, adult, tracking), </a:t>
+            </a:r>
+            <a:r>
+              <a:rPr lang="en-US" dirty="0" err="1"/>
+              <a:t>pentru</a:t>
+            </a:r>
+            <a:r>
+              <a:rPr lang="en-US" dirty="0"/>
+              <a:t> o </a:t>
+            </a:r>
+            <a:r>
+              <a:rPr lang="en-US" dirty="0" err="1"/>
+              <a:t>filtrare</a:t>
+            </a:r>
+            <a:r>
+              <a:rPr lang="en-US" dirty="0"/>
+              <a:t> </a:t>
+            </a:r>
+            <a:r>
+              <a:rPr lang="en-US" dirty="0" err="1"/>
+              <a:t>mai</a:t>
+            </a:r>
+            <a:r>
+              <a:rPr lang="en-US" dirty="0"/>
+              <a:t> </a:t>
+            </a:r>
+            <a:r>
+              <a:rPr lang="en-US" dirty="0" err="1"/>
+              <a:t>granulară</a:t>
+            </a:r>
+            <a:r>
+              <a:rPr lang="en-US" dirty="0"/>
+              <a:t>, </a:t>
+            </a:r>
+            <a:r>
+              <a:rPr lang="en-US" dirty="0" err="1"/>
+              <a:t>configurabilă</a:t>
+            </a:r>
+            <a:r>
+              <a:rPr lang="en-US" dirty="0"/>
+              <a:t> </a:t>
+            </a:r>
+            <a:r>
+              <a:rPr lang="en-US" dirty="0" err="1"/>
+              <a:t>și</a:t>
+            </a:r>
+            <a:r>
+              <a:rPr lang="en-US" dirty="0"/>
+              <a:t> </a:t>
+            </a:r>
+            <a:r>
+              <a:rPr lang="en-US" dirty="0" err="1"/>
+              <a:t>mai</a:t>
+            </a:r>
+            <a:r>
+              <a:rPr lang="en-US" dirty="0"/>
+              <a:t> </a:t>
+            </a:r>
+            <a:r>
+              <a:rPr lang="en-US" dirty="0" err="1"/>
+              <a:t>cuprinzătoare</a:t>
+            </a:r>
+            <a:r>
+              <a:rPr lang="en-US" dirty="0"/>
+              <a:t>.</a:t>
+            </a:r>
           </a:p>
         </p:txBody>
       </p:sp>
@@ -7113,6 +7500,70 @@
     <p:extLst>
       <p:ext uri="{BB962C8B-B14F-4D97-AF65-F5344CB8AC3E}">
         <p14:creationId xmlns:p14="http://schemas.microsoft.com/office/powerpoint/2010/main" val="1848391234"/>
+      </p:ext>
+    </p:extLst>
+  </p:cSld>
+  <p:clrMapOvr>
+    <a:masterClrMapping/>
+  </p:clrMapOvr>
+</p:sld>
+</file>
+
+<file path=ppt/slides/slide19.xml><?xml version="1.0" encoding="utf-8"?>
+<p:sld xmlns:a="http://schemas.openxmlformats.org/drawingml/2006/main" xmlns:r="http://schemas.openxmlformats.org/officeDocument/2006/relationships" xmlns:p="http://schemas.openxmlformats.org/presentationml/2006/main">
+  <p:cSld>
+    <p:spTree>
+      <p:nvGrpSpPr>
+        <p:cNvPr id="1" name=""/>
+        <p:cNvGrpSpPr/>
+        <p:nvPr/>
+      </p:nvGrpSpPr>
+      <p:grpSpPr>
+        <a:xfrm>
+          <a:off x="0" y="0"/>
+          <a:ext cx="0" cy="0"/>
+          <a:chOff x="0" y="0"/>
+          <a:chExt cx="0" cy="0"/>
+        </a:xfrm>
+      </p:grpSpPr>
+      <p:sp>
+        <p:nvSpPr>
+          <p:cNvPr id="2" name="Title 1">
+            <a:extLst>
+              <a:ext uri="{FF2B5EF4-FFF2-40B4-BE49-F238E27FC236}">
+                <a16:creationId xmlns:a16="http://schemas.microsoft.com/office/drawing/2014/main" id="{A9FD76FE-8BE3-641F-C907-E18A997659DA}"/>
+              </a:ext>
+            </a:extLst>
+          </p:cNvPr>
+          <p:cNvSpPr>
+            <a:spLocks noGrp="1"/>
+          </p:cNvSpPr>
+          <p:nvPr>
+            <p:ph type="title"/>
+          </p:nvPr>
+        </p:nvSpPr>
+        <p:spPr>
+          <a:xfrm>
+            <a:off x="564213" y="2692924"/>
+            <a:ext cx="8596668" cy="1320800"/>
+          </a:xfrm>
+        </p:spPr>
+        <p:txBody>
+          <a:bodyPr/>
+          <a:lstStyle/>
+          <a:p>
+            <a:r>
+              <a:rPr lang="ro-RO" dirty="0"/>
+              <a:t>Mulțumesc pentru atenția acordată!</a:t>
+            </a:r>
+            <a:endParaRPr lang="en-US" dirty="0"/>
+          </a:p>
+        </p:txBody>
+      </p:sp>
+    </p:spTree>
+    <p:extLst>
+      <p:ext uri="{BB962C8B-B14F-4D97-AF65-F5344CB8AC3E}">
+        <p14:creationId xmlns:p14="http://schemas.microsoft.com/office/powerpoint/2010/main" val="1019873953"/>
       </p:ext>
     </p:extLst>
   </p:cSld>
@@ -7385,70 +7836,6 @@
     <p:extLst>
       <p:ext uri="{BB962C8B-B14F-4D97-AF65-F5344CB8AC3E}">
         <p14:creationId xmlns:p14="http://schemas.microsoft.com/office/powerpoint/2010/main" val="142047717"/>
-      </p:ext>
-    </p:extLst>
-  </p:cSld>
-  <p:clrMapOvr>
-    <a:masterClrMapping/>
-  </p:clrMapOvr>
-</p:sld>
-</file>
-
-<file path=ppt/slides/slide20.xml><?xml version="1.0" encoding="utf-8"?>
-<p:sld xmlns:a="http://schemas.openxmlformats.org/drawingml/2006/main" xmlns:r="http://schemas.openxmlformats.org/officeDocument/2006/relationships" xmlns:p="http://schemas.openxmlformats.org/presentationml/2006/main">
-  <p:cSld>
-    <p:spTree>
-      <p:nvGrpSpPr>
-        <p:cNvPr id="1" name=""/>
-        <p:cNvGrpSpPr/>
-        <p:nvPr/>
-      </p:nvGrpSpPr>
-      <p:grpSpPr>
-        <a:xfrm>
-          <a:off x="0" y="0"/>
-          <a:ext cx="0" cy="0"/>
-          <a:chOff x="0" y="0"/>
-          <a:chExt cx="0" cy="0"/>
-        </a:xfrm>
-      </p:grpSpPr>
-      <p:sp>
-        <p:nvSpPr>
-          <p:cNvPr id="2" name="Title 1">
-            <a:extLst>
-              <a:ext uri="{FF2B5EF4-FFF2-40B4-BE49-F238E27FC236}">
-                <a16:creationId xmlns:a16="http://schemas.microsoft.com/office/drawing/2014/main" id="{A9FD76FE-8BE3-641F-C907-E18A997659DA}"/>
-              </a:ext>
-            </a:extLst>
-          </p:cNvPr>
-          <p:cNvSpPr>
-            <a:spLocks noGrp="1"/>
-          </p:cNvSpPr>
-          <p:nvPr>
-            <p:ph type="title"/>
-          </p:nvPr>
-        </p:nvSpPr>
-        <p:spPr>
-          <a:xfrm>
-            <a:off x="564213" y="2692924"/>
-            <a:ext cx="8596668" cy="1320800"/>
-          </a:xfrm>
-        </p:spPr>
-        <p:txBody>
-          <a:bodyPr/>
-          <a:lstStyle/>
-          <a:p>
-            <a:r>
-              <a:rPr lang="ro-RO" dirty="0"/>
-              <a:t>Mulțumesc pentru atenția acordată!</a:t>
-            </a:r>
-            <a:endParaRPr lang="en-US" dirty="0"/>
-          </a:p>
-        </p:txBody>
-      </p:sp>
-    </p:spTree>
-    <p:extLst>
-      <p:ext uri="{BB962C8B-B14F-4D97-AF65-F5344CB8AC3E}">
-        <p14:creationId xmlns:p14="http://schemas.microsoft.com/office/powerpoint/2010/main" val="1019873953"/>
       </p:ext>
     </p:extLst>
   </p:cSld>
@@ -8614,884 +9001,6 @@
           <p:cNvPr id="3" name="Content Placeholder 2">
             <a:extLst>
               <a:ext uri="{FF2B5EF4-FFF2-40B4-BE49-F238E27FC236}">
-                <a16:creationId xmlns:a16="http://schemas.microsoft.com/office/drawing/2014/main" id="{689213B4-2B05-6C5A-6E9E-891E43A6A704}"/>
-              </a:ext>
-            </a:extLst>
-          </p:cNvPr>
-          <p:cNvSpPr>
-            <a:spLocks noGrp="1"/>
-          </p:cNvSpPr>
-          <p:nvPr>
-            <p:ph idx="1"/>
-          </p:nvPr>
-        </p:nvSpPr>
-        <p:spPr>
-          <a:xfrm>
-            <a:off x="94267" y="131975"/>
-            <a:ext cx="8908331" cy="6240545"/>
-          </a:xfrm>
-        </p:spPr>
-        <p:txBody>
-          <a:bodyPr>
-            <a:normAutofit/>
-          </a:bodyPr>
-          <a:lstStyle/>
-          <a:p>
-            <a:r>
-              <a:rPr lang="en-US" dirty="0" err="1"/>
-              <a:t>Datele</a:t>
-            </a:r>
-            <a:r>
-              <a:rPr lang="en-US" dirty="0"/>
-              <a:t> </a:t>
-            </a:r>
-            <a:r>
-              <a:rPr lang="en-US" dirty="0" err="1"/>
-              <a:t>colectate</a:t>
-            </a:r>
-            <a:r>
-              <a:rPr lang="en-US" dirty="0"/>
-              <a:t> de pe multiple site-</a:t>
-            </a:r>
-            <a:r>
-              <a:rPr lang="en-US" dirty="0" err="1"/>
-              <a:t>uri</a:t>
-            </a:r>
-            <a:r>
-              <a:rPr lang="en-US" dirty="0"/>
-              <a:t>, care </a:t>
-            </a:r>
-            <a:r>
-              <a:rPr lang="en-US" dirty="0" err="1"/>
-              <a:t>monitorizează</a:t>
-            </a:r>
-            <a:r>
-              <a:rPr lang="en-US" dirty="0"/>
-              <a:t> </a:t>
-            </a:r>
-            <a:r>
-              <a:rPr lang="en-US" dirty="0" err="1"/>
-              <a:t>activitatea</a:t>
-            </a:r>
-            <a:r>
-              <a:rPr lang="en-US" dirty="0"/>
-              <a:t> </a:t>
-            </a:r>
-            <a:r>
-              <a:rPr lang="en-US" dirty="0" err="1"/>
-              <a:t>utilizatorilor</a:t>
-            </a:r>
-            <a:r>
-              <a:rPr lang="en-US" dirty="0"/>
-              <a:t> </a:t>
-            </a:r>
-            <a:r>
-              <a:rPr lang="en-US" dirty="0" err="1"/>
-              <a:t>și</a:t>
-            </a:r>
-            <a:r>
-              <a:rPr lang="en-US" dirty="0"/>
-              <a:t> </a:t>
-            </a:r>
-            <a:r>
-              <a:rPr lang="en-US" dirty="0" err="1"/>
-              <a:t>istoricul</a:t>
-            </a:r>
-            <a:r>
-              <a:rPr lang="en-US" dirty="0"/>
-              <a:t> </a:t>
-            </a:r>
-            <a:r>
-              <a:rPr lang="en-US" dirty="0" err="1"/>
-              <a:t>căutărilor</a:t>
-            </a:r>
-            <a:r>
-              <a:rPr lang="en-US" dirty="0"/>
-              <a:t> pe </a:t>
-            </a:r>
-            <a:r>
-              <a:rPr lang="en-US" dirty="0" err="1"/>
-              <a:t>propriile</a:t>
-            </a:r>
-            <a:r>
-              <a:rPr lang="en-US" dirty="0"/>
-              <a:t> </a:t>
-            </a:r>
-            <a:r>
-              <a:rPr lang="en-US" dirty="0" err="1"/>
-              <a:t>platforme</a:t>
-            </a:r>
-            <a:r>
-              <a:rPr lang="en-US" dirty="0"/>
-              <a:t>, pot </a:t>
-            </a:r>
-            <a:r>
-              <a:rPr lang="en-US" dirty="0" err="1"/>
-              <a:t>permite</a:t>
-            </a:r>
-            <a:r>
-              <a:rPr lang="en-US" dirty="0"/>
-              <a:t> </a:t>
-            </a:r>
-            <a:r>
-              <a:rPr lang="en-US" dirty="0" err="1"/>
-              <a:t>conturarea</a:t>
-            </a:r>
-            <a:r>
-              <a:rPr lang="en-US" dirty="0"/>
-              <a:t> </a:t>
-            </a:r>
-            <a:r>
-              <a:rPr lang="en-US" dirty="0" err="1"/>
-              <a:t>unui</a:t>
-            </a:r>
-            <a:r>
-              <a:rPr lang="en-US" dirty="0"/>
-              <a:t> </a:t>
-            </a:r>
-            <a:r>
-              <a:rPr lang="en-US" dirty="0" err="1"/>
-              <a:t>profil</a:t>
-            </a:r>
-            <a:r>
-              <a:rPr lang="en-US" dirty="0"/>
-              <a:t> </a:t>
-            </a:r>
-            <a:r>
-              <a:rPr lang="en-US" dirty="0" err="1"/>
-              <a:t>extrem</a:t>
-            </a:r>
-            <a:r>
-              <a:rPr lang="en-US" dirty="0"/>
-              <a:t> de </a:t>
-            </a:r>
-            <a:r>
-              <a:rPr lang="en-US" dirty="0" err="1"/>
-              <a:t>detaliat</a:t>
-            </a:r>
-            <a:r>
-              <a:rPr lang="en-US" dirty="0"/>
-              <a:t>. </a:t>
-            </a:r>
-            <a:r>
-              <a:rPr lang="en-US" dirty="0" err="1"/>
-              <a:t>Astfel</a:t>
-            </a:r>
-            <a:r>
-              <a:rPr lang="en-US" dirty="0"/>
-              <a:t>, se pot </a:t>
-            </a:r>
-            <a:r>
-              <a:rPr lang="en-US" dirty="0" err="1"/>
-              <a:t>estima</a:t>
-            </a:r>
-            <a:r>
-              <a:rPr lang="en-US" dirty="0"/>
-              <a:t> cu o </a:t>
-            </a:r>
-            <a:r>
-              <a:rPr lang="en-US" dirty="0" err="1"/>
-              <a:t>acuratețe</a:t>
-            </a:r>
-            <a:r>
-              <a:rPr lang="en-US" dirty="0"/>
-              <a:t> </a:t>
-            </a:r>
-            <a:r>
-              <a:rPr lang="en-US" dirty="0" err="1"/>
-              <a:t>relativ</a:t>
-            </a:r>
-            <a:r>
-              <a:rPr lang="en-US" dirty="0"/>
-              <a:t> </a:t>
-            </a:r>
-            <a:r>
-              <a:rPr lang="en-US" dirty="0" err="1"/>
-              <a:t>ridicată</a:t>
-            </a:r>
-            <a:r>
-              <a:rPr lang="en-US" dirty="0"/>
-              <a:t> </a:t>
-            </a:r>
-            <a:r>
-              <a:rPr lang="en-US" dirty="0" err="1"/>
-              <a:t>caracteristici</a:t>
-            </a:r>
-            <a:r>
-              <a:rPr lang="en-US" dirty="0"/>
-              <a:t> precum </a:t>
-            </a:r>
-            <a:r>
-              <a:rPr lang="en-US" dirty="0" err="1"/>
-              <a:t>vârsta</a:t>
-            </a:r>
-            <a:r>
-              <a:rPr lang="en-US" dirty="0"/>
-              <a:t>, </a:t>
-            </a:r>
-            <a:r>
-              <a:rPr lang="en-US" dirty="0" err="1"/>
-              <a:t>sexul</a:t>
-            </a:r>
-            <a:r>
-              <a:rPr lang="en-US" dirty="0"/>
-              <a:t>, </a:t>
-            </a:r>
-            <a:r>
-              <a:rPr lang="en-US" dirty="0" err="1"/>
-              <a:t>ocupația</a:t>
-            </a:r>
-            <a:r>
-              <a:rPr lang="en-US" dirty="0"/>
-              <a:t> </a:t>
-            </a:r>
-            <a:r>
-              <a:rPr lang="en-US" dirty="0" err="1"/>
-              <a:t>sau</a:t>
-            </a:r>
-            <a:r>
-              <a:rPr lang="en-US" dirty="0"/>
-              <a:t> </a:t>
-            </a:r>
-            <a:r>
-              <a:rPr lang="en-US" dirty="0" err="1"/>
-              <a:t>nivelul</a:t>
-            </a:r>
-            <a:r>
-              <a:rPr lang="en-US" dirty="0"/>
-              <a:t> de </a:t>
-            </a:r>
-            <a:r>
-              <a:rPr lang="en-US" dirty="0" err="1"/>
-              <a:t>educație</a:t>
-            </a:r>
-            <a:r>
-              <a:rPr lang="en-US" dirty="0"/>
-              <a:t>. </a:t>
-            </a:r>
-          </a:p>
-          <a:p>
-            <a:r>
-              <a:rPr lang="en-US" dirty="0"/>
-              <a:t>De </a:t>
-            </a:r>
-            <a:r>
-              <a:rPr lang="en-US" dirty="0" err="1"/>
-              <a:t>exemplu</a:t>
-            </a:r>
-            <a:r>
-              <a:rPr lang="en-US" dirty="0"/>
-              <a:t>, un </a:t>
-            </a:r>
-            <a:r>
-              <a:rPr lang="en-US" dirty="0" err="1"/>
-              <a:t>tipar</a:t>
-            </a:r>
-            <a:r>
-              <a:rPr lang="en-US" dirty="0"/>
-              <a:t> de </a:t>
-            </a:r>
-            <a:r>
-              <a:rPr lang="en-US" dirty="0" err="1"/>
-              <a:t>utilizare</a:t>
-            </a:r>
-            <a:r>
-              <a:rPr lang="en-US" dirty="0"/>
-              <a:t> </a:t>
-            </a:r>
-            <a:r>
-              <a:rPr lang="en-US" dirty="0" err="1"/>
-              <a:t>nocturnă</a:t>
-            </a:r>
-            <a:r>
-              <a:rPr lang="en-US" dirty="0"/>
-              <a:t>, </a:t>
-            </a:r>
-            <a:r>
-              <a:rPr lang="en-US" dirty="0" err="1"/>
-              <a:t>corelat</a:t>
-            </a:r>
-            <a:r>
-              <a:rPr lang="en-US" dirty="0"/>
-              <a:t> cu </a:t>
-            </a:r>
-            <a:r>
-              <a:rPr lang="en-US" dirty="0" err="1"/>
-              <a:t>accesarea</a:t>
-            </a:r>
-            <a:r>
-              <a:rPr lang="en-US" dirty="0"/>
-              <a:t> </a:t>
-            </a:r>
-            <a:r>
-              <a:rPr lang="en-US" dirty="0" err="1"/>
-              <a:t>frecventă</a:t>
-            </a:r>
-            <a:r>
-              <a:rPr lang="en-US" dirty="0"/>
-              <a:t> a </a:t>
-            </a:r>
-            <a:r>
-              <a:rPr lang="en-US" dirty="0" err="1"/>
-              <a:t>resurselor</a:t>
-            </a:r>
-            <a:r>
-              <a:rPr lang="en-US" dirty="0"/>
-              <a:t> </a:t>
-            </a:r>
-            <a:r>
-              <a:rPr lang="en-US" dirty="0" err="1"/>
-              <a:t>academice</a:t>
-            </a:r>
-            <a:r>
-              <a:rPr lang="en-US" dirty="0"/>
-              <a:t>, </a:t>
-            </a:r>
-            <a:r>
-              <a:rPr lang="en-US" dirty="0" err="1"/>
-              <a:t>poate</a:t>
-            </a:r>
-            <a:r>
-              <a:rPr lang="en-US" dirty="0"/>
-              <a:t> </a:t>
-            </a:r>
-            <a:r>
-              <a:rPr lang="en-US" dirty="0" err="1"/>
-              <a:t>sugera</a:t>
-            </a:r>
-            <a:r>
-              <a:rPr lang="en-US" dirty="0"/>
-              <a:t> </a:t>
-            </a:r>
-            <a:r>
-              <a:rPr lang="en-US" dirty="0" err="1"/>
-              <a:t>faptul</a:t>
-            </a:r>
-            <a:r>
-              <a:rPr lang="en-US" dirty="0"/>
-              <a:t> </a:t>
-            </a:r>
-            <a:r>
-              <a:rPr lang="en-US" dirty="0" err="1"/>
-              <a:t>că</a:t>
-            </a:r>
-            <a:r>
-              <a:rPr lang="en-US" dirty="0"/>
-              <a:t> </a:t>
-            </a:r>
-            <a:r>
-              <a:rPr lang="en-US" dirty="0" err="1"/>
-              <a:t>utilizatorul</a:t>
-            </a:r>
-            <a:r>
-              <a:rPr lang="en-US" dirty="0"/>
-              <a:t> </a:t>
-            </a:r>
-            <a:r>
-              <a:rPr lang="en-US" dirty="0" err="1"/>
-              <a:t>este</a:t>
-            </a:r>
-            <a:r>
-              <a:rPr lang="en-US" dirty="0"/>
-              <a:t> student </a:t>
-            </a:r>
-            <a:r>
-              <a:rPr lang="en-US" dirty="0" err="1"/>
-              <a:t>și</a:t>
-            </a:r>
-            <a:r>
-              <a:rPr lang="en-US" dirty="0"/>
-              <a:t>, </a:t>
-            </a:r>
-            <a:r>
-              <a:rPr lang="en-US" dirty="0" err="1"/>
-              <a:t>probabil</a:t>
-            </a:r>
-            <a:r>
-              <a:rPr lang="en-US" dirty="0"/>
-              <a:t>, nu </a:t>
-            </a:r>
-            <a:r>
-              <a:rPr lang="en-US" dirty="0" err="1"/>
-              <a:t>este</a:t>
-            </a:r>
-            <a:r>
-              <a:rPr lang="en-US" dirty="0"/>
-              <a:t> </a:t>
-            </a:r>
-            <a:r>
-              <a:rPr lang="en-US" dirty="0" err="1"/>
-              <a:t>angajat</a:t>
-            </a:r>
-            <a:r>
-              <a:rPr lang="en-US" dirty="0"/>
-              <a:t> cu </a:t>
-            </a:r>
-            <a:r>
-              <a:rPr lang="en-US" dirty="0" err="1"/>
-              <a:t>normă</a:t>
-            </a:r>
-            <a:r>
-              <a:rPr lang="en-US" dirty="0"/>
-              <a:t> </a:t>
-            </a:r>
-            <a:r>
-              <a:rPr lang="en-US" dirty="0" err="1"/>
-              <a:t>întreagă</a:t>
-            </a:r>
-            <a:r>
-              <a:rPr lang="en-US" dirty="0"/>
-              <a:t>. </a:t>
-            </a:r>
-            <a:r>
-              <a:rPr lang="en-US" dirty="0" err="1"/>
-              <a:t>În</a:t>
-            </a:r>
-            <a:r>
-              <a:rPr lang="en-US" dirty="0"/>
-              <a:t> plus, pot fi </a:t>
-            </a:r>
-            <a:r>
-              <a:rPr lang="en-US" dirty="0" err="1"/>
-              <a:t>deduse</a:t>
-            </a:r>
-            <a:r>
-              <a:rPr lang="en-US" dirty="0"/>
-              <a:t> </a:t>
-            </a:r>
-            <a:r>
-              <a:rPr lang="en-US" dirty="0" err="1"/>
-              <a:t>inclusiv</a:t>
-            </a:r>
-            <a:r>
-              <a:rPr lang="en-US" dirty="0"/>
-              <a:t> </a:t>
-            </a:r>
-            <a:r>
-              <a:rPr lang="en-US" dirty="0" err="1"/>
-              <a:t>aspecte</a:t>
-            </a:r>
-            <a:r>
-              <a:rPr lang="en-US" dirty="0"/>
-              <a:t> </a:t>
-            </a:r>
-            <a:r>
-              <a:rPr lang="en-US" dirty="0" err="1"/>
-              <a:t>sensibile</a:t>
-            </a:r>
-            <a:r>
-              <a:rPr lang="en-US" dirty="0"/>
-              <a:t>, precum </a:t>
-            </a:r>
-            <a:r>
-              <a:rPr lang="en-US" dirty="0" err="1"/>
-              <a:t>convingerile</a:t>
-            </a:r>
-            <a:r>
-              <a:rPr lang="en-US" dirty="0"/>
-              <a:t> </a:t>
-            </a:r>
-            <a:r>
-              <a:rPr lang="en-US" dirty="0" err="1"/>
-              <a:t>religioase</a:t>
-            </a:r>
-            <a:r>
-              <a:rPr lang="en-US" dirty="0"/>
-              <a:t>, </a:t>
-            </a:r>
-            <a:r>
-              <a:rPr lang="en-US" dirty="0" err="1"/>
-              <a:t>orientarea</a:t>
-            </a:r>
-            <a:r>
-              <a:rPr lang="en-US" dirty="0"/>
-              <a:t> </a:t>
-            </a:r>
-            <a:r>
-              <a:rPr lang="en-US" dirty="0" err="1"/>
-              <a:t>politică</a:t>
-            </a:r>
-            <a:r>
-              <a:rPr lang="en-US" dirty="0"/>
-              <a:t> </a:t>
-            </a:r>
-            <a:r>
-              <a:rPr lang="en-US" dirty="0" err="1"/>
-              <a:t>sau</a:t>
-            </a:r>
-            <a:r>
-              <a:rPr lang="en-US" dirty="0"/>
-              <a:t> </a:t>
-            </a:r>
-            <a:r>
-              <a:rPr lang="en-US" dirty="0" err="1"/>
-              <a:t>sexuală</a:t>
-            </a:r>
-            <a:r>
-              <a:rPr lang="en-US" dirty="0"/>
-              <a:t>, precum </a:t>
-            </a:r>
-            <a:r>
-              <a:rPr lang="en-US" dirty="0" err="1"/>
-              <a:t>și</a:t>
-            </a:r>
-            <a:r>
-              <a:rPr lang="en-US" dirty="0"/>
-              <a:t> diverse </a:t>
-            </a:r>
-            <a:r>
-              <a:rPr lang="en-US" dirty="0" err="1"/>
-              <a:t>preferințe</a:t>
-            </a:r>
-            <a:r>
-              <a:rPr lang="en-US" dirty="0"/>
-              <a:t> </a:t>
-            </a:r>
-            <a:r>
-              <a:rPr lang="en-US" dirty="0" err="1"/>
-              <a:t>personale</a:t>
-            </a:r>
-            <a:r>
-              <a:rPr lang="en-US" dirty="0"/>
-              <a:t>. </a:t>
-            </a:r>
-            <a:r>
-              <a:rPr lang="en-US" dirty="0" err="1"/>
-              <a:t>Aceste</a:t>
-            </a:r>
-            <a:r>
-              <a:rPr lang="en-US" dirty="0"/>
-              <a:t> </a:t>
-            </a:r>
-            <a:r>
-              <a:rPr lang="en-US" dirty="0" err="1"/>
-              <a:t>informații</a:t>
-            </a:r>
-            <a:r>
-              <a:rPr lang="en-US" dirty="0"/>
-              <a:t> au o </a:t>
-            </a:r>
-            <a:r>
-              <a:rPr lang="en-US" dirty="0" err="1"/>
-              <a:t>valoare</a:t>
-            </a:r>
-            <a:r>
-              <a:rPr lang="en-US" dirty="0"/>
-              <a:t> </a:t>
-            </a:r>
-            <a:r>
-              <a:rPr lang="en-US" dirty="0" err="1"/>
-              <a:t>considerabilă</a:t>
-            </a:r>
-            <a:r>
-              <a:rPr lang="en-US" dirty="0"/>
-              <a:t> </a:t>
-            </a:r>
-            <a:r>
-              <a:rPr lang="en-US" dirty="0" err="1"/>
-              <a:t>pentru</a:t>
-            </a:r>
-            <a:r>
-              <a:rPr lang="en-US" dirty="0"/>
-              <a:t> </a:t>
-            </a:r>
-            <a:r>
-              <a:rPr lang="en-US" dirty="0" err="1"/>
-              <a:t>companii</a:t>
-            </a:r>
-            <a:r>
-              <a:rPr lang="en-US" dirty="0"/>
-              <a:t>, </a:t>
-            </a:r>
-            <a:r>
-              <a:rPr lang="en-US" dirty="0" err="1"/>
-              <a:t>întrucât</a:t>
-            </a:r>
-            <a:r>
-              <a:rPr lang="en-US" dirty="0"/>
-              <a:t> permit </a:t>
-            </a:r>
-            <a:r>
-              <a:rPr lang="en-US" dirty="0" err="1"/>
-              <a:t>realizarea</a:t>
-            </a:r>
-            <a:r>
-              <a:rPr lang="en-US" dirty="0"/>
-              <a:t> </a:t>
-            </a:r>
-            <a:r>
-              <a:rPr lang="en-US" dirty="0" err="1"/>
-              <a:t>unor</a:t>
-            </a:r>
-            <a:r>
-              <a:rPr lang="en-US" dirty="0"/>
-              <a:t> </a:t>
-            </a:r>
-            <a:r>
-              <a:rPr lang="en-US" dirty="0" err="1"/>
-              <a:t>campanii</a:t>
-            </a:r>
-            <a:r>
-              <a:rPr lang="en-US" dirty="0"/>
-              <a:t> </a:t>
-            </a:r>
-            <a:r>
-              <a:rPr lang="en-US" dirty="0" err="1"/>
-              <a:t>publicitare</a:t>
-            </a:r>
-            <a:r>
-              <a:rPr lang="en-US" dirty="0"/>
-              <a:t> </a:t>
-            </a:r>
-            <a:r>
-              <a:rPr lang="en-US" dirty="0" err="1"/>
-              <a:t>extrem</a:t>
-            </a:r>
-            <a:r>
-              <a:rPr lang="en-US" dirty="0"/>
-              <a:t> de bine </a:t>
-            </a:r>
-            <a:r>
-              <a:rPr lang="en-US" dirty="0" err="1"/>
-              <a:t>direcționate</a:t>
-            </a:r>
-            <a:r>
-              <a:rPr lang="en-US" dirty="0"/>
-              <a:t> </a:t>
-            </a:r>
-            <a:r>
-              <a:rPr lang="en-US" dirty="0" err="1"/>
-              <a:t>și</a:t>
-            </a:r>
-            <a:r>
-              <a:rPr lang="en-US" dirty="0"/>
-              <a:t> </a:t>
-            </a:r>
-            <a:r>
-              <a:rPr lang="en-US" dirty="0" err="1"/>
-              <a:t>personalizate</a:t>
-            </a:r>
-            <a:r>
-              <a:rPr lang="en-US" dirty="0"/>
-              <a:t>, </a:t>
-            </a:r>
-            <a:r>
-              <a:rPr lang="en-US" dirty="0" err="1"/>
-              <a:t>dar</a:t>
-            </a:r>
-            <a:r>
-              <a:rPr lang="en-US" dirty="0"/>
-              <a:t> </a:t>
-            </a:r>
-            <a:r>
-              <a:rPr lang="en-US" dirty="0" err="1"/>
-              <a:t>și</a:t>
-            </a:r>
-            <a:r>
-              <a:rPr lang="en-US" dirty="0"/>
-              <a:t> </a:t>
-            </a:r>
-            <a:r>
-              <a:rPr lang="en-US" dirty="0" err="1"/>
-              <a:t>activități</a:t>
-            </a:r>
-            <a:r>
-              <a:rPr lang="en-US" dirty="0"/>
-              <a:t> de </a:t>
-            </a:r>
-            <a:r>
-              <a:rPr lang="en-US" dirty="0" err="1"/>
-              <a:t>monitorizare</a:t>
-            </a:r>
-            <a:r>
-              <a:rPr lang="en-US" dirty="0"/>
-              <a:t> </a:t>
-            </a:r>
-            <a:r>
-              <a:rPr lang="en-US" dirty="0" err="1"/>
-              <a:t>comportamentală</a:t>
-            </a:r>
-            <a:r>
-              <a:rPr lang="en-US" dirty="0"/>
-              <a:t>. </a:t>
-            </a:r>
-            <a:r>
-              <a:rPr lang="en-US" dirty="0" err="1"/>
-              <a:t>Totodată</a:t>
-            </a:r>
-            <a:r>
-              <a:rPr lang="en-US" dirty="0"/>
-              <a:t>, </a:t>
-            </a:r>
-            <a:r>
-              <a:rPr lang="en-US" dirty="0" err="1"/>
-              <a:t>ele</a:t>
-            </a:r>
-            <a:r>
-              <a:rPr lang="en-US" dirty="0"/>
-              <a:t> pot fi </a:t>
-            </a:r>
-            <a:r>
-              <a:rPr lang="en-US" dirty="0" err="1"/>
-              <a:t>exploatate</a:t>
-            </a:r>
-            <a:r>
-              <a:rPr lang="en-US" dirty="0"/>
-              <a:t> </a:t>
-            </a:r>
-            <a:r>
-              <a:rPr lang="en-US" dirty="0" err="1"/>
-              <a:t>în</a:t>
-            </a:r>
-            <a:r>
-              <a:rPr lang="en-US" dirty="0"/>
-              <a:t> </a:t>
-            </a:r>
-            <a:r>
-              <a:rPr lang="en-US" dirty="0" err="1"/>
-              <a:t>scopuri</a:t>
-            </a:r>
-            <a:r>
-              <a:rPr lang="en-US" dirty="0"/>
-              <a:t> </a:t>
-            </a:r>
-            <a:r>
-              <a:rPr lang="en-US" dirty="0" err="1"/>
-              <a:t>malițioase</a:t>
-            </a:r>
-            <a:r>
-              <a:rPr lang="en-US" dirty="0"/>
-              <a:t>, cum </a:t>
-            </a:r>
-            <a:r>
-              <a:rPr lang="en-US" dirty="0" err="1"/>
-              <a:t>ar</a:t>
-            </a:r>
-            <a:r>
-              <a:rPr lang="en-US" dirty="0"/>
-              <a:t> fi </a:t>
-            </a:r>
-            <a:r>
-              <a:rPr lang="en-US" dirty="0" err="1"/>
-              <a:t>atacurile</a:t>
-            </a:r>
-            <a:r>
-              <a:rPr lang="en-US" dirty="0"/>
-              <a:t> </a:t>
-            </a:r>
-            <a:r>
-              <a:rPr lang="en-US" dirty="0" err="1"/>
-              <a:t>cibernetice</a:t>
-            </a:r>
-            <a:r>
-              <a:rPr lang="en-US" dirty="0"/>
-              <a:t> de tip spear phishing (un tip de phishing </a:t>
-            </a:r>
-            <a:r>
-              <a:rPr lang="en-US" dirty="0" err="1"/>
-              <a:t>direcționat</a:t>
-            </a:r>
-            <a:r>
-              <a:rPr lang="en-US" dirty="0"/>
-              <a:t>, </a:t>
-            </a:r>
-            <a:r>
-              <a:rPr lang="en-US" dirty="0" err="1"/>
-              <a:t>conceput</a:t>
-            </a:r>
-            <a:r>
-              <a:rPr lang="en-US" dirty="0"/>
-              <a:t> special </a:t>
-            </a:r>
-            <a:r>
-              <a:rPr lang="en-US" dirty="0" err="1"/>
-              <a:t>pentru</a:t>
-            </a:r>
-            <a:r>
-              <a:rPr lang="en-US" dirty="0"/>
-              <a:t> o </a:t>
-            </a:r>
-            <a:r>
-              <a:rPr lang="en-US" dirty="0" err="1"/>
-              <a:t>anumită</a:t>
-            </a:r>
-            <a:r>
-              <a:rPr lang="en-US" dirty="0"/>
-              <a:t> </a:t>
-            </a:r>
-            <a:r>
-              <a:rPr lang="en-US" dirty="0" err="1"/>
-              <a:t>persoană</a:t>
-            </a:r>
-            <a:r>
-              <a:rPr lang="en-US" dirty="0"/>
-              <a:t> </a:t>
-            </a:r>
-            <a:r>
-              <a:rPr lang="en-US" dirty="0" err="1"/>
-              <a:t>sau</a:t>
-            </a:r>
-            <a:r>
-              <a:rPr lang="en-US" dirty="0"/>
-              <a:t> un </a:t>
-            </a:r>
-            <a:r>
-              <a:rPr lang="en-US" dirty="0" err="1"/>
-              <a:t>grup</a:t>
-            </a:r>
-            <a:r>
-              <a:rPr lang="en-US" dirty="0"/>
-              <a:t> </a:t>
-            </a:r>
-            <a:r>
-              <a:rPr lang="en-US" dirty="0" err="1"/>
-              <a:t>restrâns</a:t>
-            </a:r>
-            <a:r>
-              <a:rPr lang="en-US" dirty="0"/>
-              <a:t>).</a:t>
-            </a:r>
-          </a:p>
-          <a:p>
-            <a:endParaRPr lang="en-US" dirty="0"/>
-          </a:p>
-        </p:txBody>
-      </p:sp>
-    </p:spTree>
-    <p:extLst>
-      <p:ext uri="{BB962C8B-B14F-4D97-AF65-F5344CB8AC3E}">
-        <p14:creationId xmlns:p14="http://schemas.microsoft.com/office/powerpoint/2010/main" val="63916184"/>
-      </p:ext>
-    </p:extLst>
-  </p:cSld>
-  <p:clrMapOvr>
-    <a:masterClrMapping/>
-  </p:clrMapOvr>
-</p:sld>
-</file>
-
-<file path=ppt/slides/slide5.xml><?xml version="1.0" encoding="utf-8"?>
-<p:sld xmlns:a="http://schemas.openxmlformats.org/drawingml/2006/main" xmlns:r="http://schemas.openxmlformats.org/officeDocument/2006/relationships" xmlns:p="http://schemas.openxmlformats.org/presentationml/2006/main">
-  <p:cSld>
-    <p:spTree>
-      <p:nvGrpSpPr>
-        <p:cNvPr id="1" name=""/>
-        <p:cNvGrpSpPr/>
-        <p:nvPr/>
-      </p:nvGrpSpPr>
-      <p:grpSpPr>
-        <a:xfrm>
-          <a:off x="0" y="0"/>
-          <a:ext cx="0" cy="0"/>
-          <a:chOff x="0" y="0"/>
-          <a:chExt cx="0" cy="0"/>
-        </a:xfrm>
-      </p:grpSpPr>
-      <p:sp>
-        <p:nvSpPr>
-          <p:cNvPr id="3" name="Content Placeholder 2">
-            <a:extLst>
-              <a:ext uri="{FF2B5EF4-FFF2-40B4-BE49-F238E27FC236}">
                 <a16:creationId xmlns:a16="http://schemas.microsoft.com/office/drawing/2014/main" id="{E31D1375-DD9E-99E1-29D6-66DC22886A17}"/>
               </a:ext>
             </a:extLst>
@@ -9517,6 +9026,24 @@
           <a:p>
             <a:r>
               <a:rPr lang="en-US" dirty="0" err="1"/>
+              <a:t>Aceste</a:t>
+            </a:r>
+            <a:r>
+              <a:rPr lang="en-US" dirty="0"/>
+              <a:t> date pot fi </a:t>
+            </a:r>
+            <a:r>
+              <a:rPr lang="ro-RO" dirty="0"/>
+              <a:t>agregate de-a lungul a mai mute site-uri pentru a obtine inlcusiv date despre comportamentul utilizatorilor pe anumite platforme de genul e-commerce unde pot fi observate preferinte, comportamente precum și psihologia lor.</a:t>
+            </a:r>
+            <a:endParaRPr lang="en-US" dirty="0"/>
+          </a:p>
+          <a:p>
+            <a:endParaRPr lang="en-US" dirty="0"/>
+          </a:p>
+          <a:p>
+            <a:r>
+              <a:rPr lang="en-US" dirty="0" err="1"/>
               <a:t>În</a:t>
             </a:r>
             <a:r>
@@ -10430,7 +9957,7 @@
 </p:sld>
 </file>
 
-<file path=ppt/slides/slide6.xml><?xml version="1.0" encoding="utf-8"?>
+<file path=ppt/slides/slide5.xml><?xml version="1.0" encoding="utf-8"?>
 <p:sld xmlns:a="http://schemas.openxmlformats.org/drawingml/2006/main" xmlns:r="http://schemas.openxmlformats.org/officeDocument/2006/relationships" xmlns:p="http://schemas.openxmlformats.org/presentationml/2006/main">
   <p:cSld>
     <p:spTree>
@@ -11212,7 +10739,7 @@
 </p:sld>
 </file>
 
-<file path=ppt/slides/slide7.xml><?xml version="1.0" encoding="utf-8"?>
+<file path=ppt/slides/slide6.xml><?xml version="1.0" encoding="utf-8"?>
 <p:sld xmlns:a="http://schemas.openxmlformats.org/drawingml/2006/main" xmlns:r="http://schemas.openxmlformats.org/officeDocument/2006/relationships" xmlns:p="http://schemas.openxmlformats.org/presentationml/2006/main">
   <p:cSld>
     <p:spTree>
@@ -11805,7 +11332,7 @@
 </p:sld>
 </file>
 
-<file path=ppt/slides/slide8.xml><?xml version="1.0" encoding="utf-8"?>
+<file path=ppt/slides/slide7.xml><?xml version="1.0" encoding="utf-8"?>
 <p:sld xmlns:a="http://schemas.openxmlformats.org/drawingml/2006/main" xmlns:r="http://schemas.openxmlformats.org/officeDocument/2006/relationships" xmlns:p="http://schemas.openxmlformats.org/presentationml/2006/main">
   <p:cSld>
     <p:spTree>
@@ -12786,7 +12313,7 @@
 </p:sld>
 </file>
 
-<file path=ppt/slides/slide9.xml><?xml version="1.0" encoding="utf-8"?>
+<file path=ppt/slides/slide8.xml><?xml version="1.0" encoding="utf-8"?>
 <p:sld xmlns:a="http://schemas.openxmlformats.org/drawingml/2006/main" xmlns:r="http://schemas.openxmlformats.org/officeDocument/2006/relationships" xmlns:p="http://schemas.openxmlformats.org/presentationml/2006/main">
   <p:cSld>
     <p:spTree>
@@ -12860,7 +12387,15 @@
           <a:p>
             <a:r>
               <a:rPr lang="ro-RO" dirty="0"/>
-              <a:t>Datele au fost colectate prin web scraping de la patru furnizori de CMP (Consent Management Platforms). Aceste platforme asigură conformitatea site-urilor cu reglementările GDPR, iar funcția lor de scanare permite extragerea cookie-urilor dintr-o bază de date ce reprezintă un ground truth pentru antrenarea modelelor. Procesul, fiind lent, a fost paralelizat pe multiple thread-uri și utilizând containere Docker pe mai multe calculatoare, pentru a acoperi un număr cât mai mare de site-uri. Acestea au fost selectate dintre primele 100.000 cele mai vizitate (conform unui ranking propriu, bazat pe accesibilitatea domeniilor, excluzând cele DNS folosite pentru reclame sau inaccesibile utilizatorilor). Astfel, cookie-urile extrase sunt relevante, iar expunerea prealabilă a modelelor la aceste date îmbunătățește substanțial precizia predicțiilor pe site-uri frecvent accesate de utilizatori.</a:t>
+              <a:t>Datele au fost colectate prin web scraping de la patru furnizori de CMP (Consent Management Platforms). Aceste platforme asigură conformitatea site-urilor cu reglementările GDPR, iar funcția lor de scanare permite extragerea cookie-urilor dintr-o bază de date ce reprezintă un ground truth pentru antrenarea modelelor. Procesul, fiind lent, a fost paralelizat pe multiple thread-uri și utilizând containere Docker pe mai multe calculatoare, pentru a acoperi un număr cât mai mare de site-uri. Acestea au fost selectate dintre </a:t>
+            </a:r>
+            <a:r>
+              <a:rPr lang="ro-RO"/>
+              <a:t>primele 38.400 </a:t>
+            </a:r>
+            <a:r>
+              <a:rPr lang="ro-RO" dirty="0"/>
+              <a:t>cele mai vizitate (conform unui ranking propriu, bazat pe accesibilitatea domeniilor, excluzând cele DNS folosite pentru reclame sau inaccesibile utilizatorilor). Astfel, cookie-urile extrase sunt relevante, iar expunerea prealabilă a modelelor la aceste date îmbunătățește substanțial precizia predicțiilor pe site-uri frecvent accesate de utilizatori.</a:t>
             </a:r>
             <a:endParaRPr lang="en-US" dirty="0"/>
           </a:p>
@@ -12870,6 +12405,103 @@
     <p:extLst>
       <p:ext uri="{BB962C8B-B14F-4D97-AF65-F5344CB8AC3E}">
         <p14:creationId xmlns:p14="http://schemas.microsoft.com/office/powerpoint/2010/main" val="4287781881"/>
+      </p:ext>
+    </p:extLst>
+  </p:cSld>
+  <p:clrMapOvr>
+    <a:masterClrMapping/>
+  </p:clrMapOvr>
+</p:sld>
+</file>
+
+<file path=ppt/slides/slide9.xml><?xml version="1.0" encoding="utf-8"?>
+<p:sld xmlns:a="http://schemas.openxmlformats.org/drawingml/2006/main" xmlns:r="http://schemas.openxmlformats.org/officeDocument/2006/relationships" xmlns:p="http://schemas.openxmlformats.org/presentationml/2006/main">
+  <p:cSld>
+    <p:spTree>
+      <p:nvGrpSpPr>
+        <p:cNvPr id="1" name=""/>
+        <p:cNvGrpSpPr/>
+        <p:nvPr/>
+      </p:nvGrpSpPr>
+      <p:grpSpPr>
+        <a:xfrm>
+          <a:off x="0" y="0"/>
+          <a:ext cx="0" cy="0"/>
+          <a:chOff x="0" y="0"/>
+          <a:chExt cx="0" cy="0"/>
+        </a:xfrm>
+      </p:grpSpPr>
+      <p:sp>
+        <p:nvSpPr>
+          <p:cNvPr id="2" name="Title 1">
+            <a:extLst>
+              <a:ext uri="{FF2B5EF4-FFF2-40B4-BE49-F238E27FC236}">
+                <a16:creationId xmlns:a16="http://schemas.microsoft.com/office/drawing/2014/main" id="{8C5E2877-1CD7-DAC1-C84C-9FB856A59238}"/>
+              </a:ext>
+            </a:extLst>
+          </p:cNvPr>
+          <p:cNvSpPr>
+            <a:spLocks noGrp="1"/>
+          </p:cNvSpPr>
+          <p:nvPr>
+            <p:ph type="title"/>
+          </p:nvPr>
+        </p:nvSpPr>
+        <p:spPr/>
+        <p:txBody>
+          <a:bodyPr/>
+          <a:lstStyle/>
+          <a:p>
+            <a:r>
+              <a:rPr lang="ro-RO" dirty="0"/>
+              <a:t>Data Distribution</a:t>
+            </a:r>
+            <a:endParaRPr lang="en-US" dirty="0"/>
+          </a:p>
+        </p:txBody>
+      </p:sp>
+      <p:pic>
+        <p:nvPicPr>
+          <p:cNvPr id="5" name="Content Placeholder 4">
+            <a:extLst>
+              <a:ext uri="{FF2B5EF4-FFF2-40B4-BE49-F238E27FC236}">
+                <a16:creationId xmlns:a16="http://schemas.microsoft.com/office/drawing/2014/main" id="{DC2734F6-9E4B-1E80-B964-9EB730D042A6}"/>
+              </a:ext>
+            </a:extLst>
+          </p:cNvPr>
+          <p:cNvPicPr>
+            <a:picLocks noGrp="1" noChangeAspect="1"/>
+          </p:cNvPicPr>
+          <p:nvPr>
+            <p:ph idx="1"/>
+          </p:nvPr>
+        </p:nvPicPr>
+        <p:blipFill>
+          <a:blip r:embed="rId2">
+            <a:extLst>
+              <a:ext uri="{28A0092B-C50C-407E-A947-70E740481C1C}">
+                <a14:useLocalDpi xmlns:a14="http://schemas.microsoft.com/office/drawing/2010/main" val="0"/>
+              </a:ext>
+            </a:extLst>
+          </a:blip>
+          <a:stretch>
+            <a:fillRect/>
+          </a:stretch>
+        </p:blipFill>
+        <p:spPr>
+          <a:xfrm>
+            <a:off x="53934" y="1640264"/>
+            <a:ext cx="8803522" cy="4732256"/>
+          </a:xfrm>
+          <a:prstGeom prst="rect">
+            <a:avLst/>
+          </a:prstGeom>
+        </p:spPr>
+      </p:pic>
+    </p:spTree>
+    <p:extLst>
+      <p:ext uri="{BB962C8B-B14F-4D97-AF65-F5344CB8AC3E}">
+        <p14:creationId xmlns:p14="http://schemas.microsoft.com/office/powerpoint/2010/main" val="3781320747"/>
       </p:ext>
     </p:extLst>
   </p:cSld>

--- a/Presentation_Cookie_Classifier.pptx
+++ b/Presentation_Cookie_Classifier.pptx
@@ -854,7 +854,7 @@
           <a:p>
             <a:fld id="{C7AA466E-39B5-4C10-B600-8A7969289383}" type="datetimeFigureOut">
               <a:rPr lang="en-US" smtClean="0"/>
-              <a:t>6/3/2026</a:t>
+              <a:t>6/28/2026</a:t>
             </a:fld>
             <a:endParaRPr lang="en-US"/>
           </a:p>
@@ -1105,7 +1105,7 @@
           <a:p>
             <a:fld id="{C7AA466E-39B5-4C10-B600-8A7969289383}" type="datetimeFigureOut">
               <a:rPr lang="en-US" smtClean="0"/>
-              <a:t>6/3/2026</a:t>
+              <a:t>6/28/2026</a:t>
             </a:fld>
             <a:endParaRPr lang="en-US"/>
           </a:p>
@@ -1419,7 +1419,7 @@
           <a:p>
             <a:fld id="{C7AA466E-39B5-4C10-B600-8A7969289383}" type="datetimeFigureOut">
               <a:rPr lang="en-US" smtClean="0"/>
-              <a:t>6/3/2026</a:t>
+              <a:t>6/28/2026</a:t>
             </a:fld>
             <a:endParaRPr lang="en-US"/>
           </a:p>
@@ -1746,7 +1746,7 @@
           <a:p>
             <a:fld id="{C7AA466E-39B5-4C10-B600-8A7969289383}" type="datetimeFigureOut">
               <a:rPr lang="en-US" smtClean="0"/>
-              <a:t>6/3/2026</a:t>
+              <a:t>6/28/2026</a:t>
             </a:fld>
             <a:endParaRPr lang="en-US"/>
           </a:p>
@@ -2060,7 +2060,7 @@
           <a:p>
             <a:fld id="{C7AA466E-39B5-4C10-B600-8A7969289383}" type="datetimeFigureOut">
               <a:rPr lang="en-US" smtClean="0"/>
-              <a:t>6/3/2026</a:t>
+              <a:t>6/28/2026</a:t>
             </a:fld>
             <a:endParaRPr lang="en-US"/>
           </a:p>
@@ -2447,7 +2447,7 @@
           <a:p>
             <a:fld id="{C7AA466E-39B5-4C10-B600-8A7969289383}" type="datetimeFigureOut">
               <a:rPr lang="en-US" smtClean="0"/>
-              <a:t>6/3/2026</a:t>
+              <a:t>6/28/2026</a:t>
             </a:fld>
             <a:endParaRPr lang="en-US"/>
           </a:p>
@@ -2617,7 +2617,7 @@
           <a:p>
             <a:fld id="{C7AA466E-39B5-4C10-B600-8A7969289383}" type="datetimeFigureOut">
               <a:rPr lang="en-US" smtClean="0"/>
-              <a:t>6/3/2026</a:t>
+              <a:t>6/28/2026</a:t>
             </a:fld>
             <a:endParaRPr lang="en-US"/>
           </a:p>
@@ -2797,7 +2797,7 @@
           <a:p>
             <a:fld id="{C7AA466E-39B5-4C10-B600-8A7969289383}" type="datetimeFigureOut">
               <a:rPr lang="en-US" smtClean="0"/>
-              <a:t>6/3/2026</a:t>
+              <a:t>6/28/2026</a:t>
             </a:fld>
             <a:endParaRPr lang="en-US"/>
           </a:p>
@@ -2973,7 +2973,7 @@
           <a:p>
             <a:fld id="{C7AA466E-39B5-4C10-B600-8A7969289383}" type="datetimeFigureOut">
               <a:rPr lang="en-US" smtClean="0"/>
-              <a:t>6/3/2026</a:t>
+              <a:t>6/28/2026</a:t>
             </a:fld>
             <a:endParaRPr lang="en-US"/>
           </a:p>
@@ -3220,7 +3220,7 @@
           <a:p>
             <a:fld id="{C7AA466E-39B5-4C10-B600-8A7969289383}" type="datetimeFigureOut">
               <a:rPr lang="en-US" smtClean="0"/>
-              <a:t>6/3/2026</a:t>
+              <a:t>6/28/2026</a:t>
             </a:fld>
             <a:endParaRPr lang="en-US"/>
           </a:p>
@@ -3452,7 +3452,7 @@
           <a:p>
             <a:fld id="{C7AA466E-39B5-4C10-B600-8A7969289383}" type="datetimeFigureOut">
               <a:rPr lang="en-US" smtClean="0"/>
-              <a:t>6/3/2026</a:t>
+              <a:t>6/28/2026</a:t>
             </a:fld>
             <a:endParaRPr lang="en-US"/>
           </a:p>
@@ -3826,7 +3826,7 @@
           <a:p>
             <a:fld id="{C7AA466E-39B5-4C10-B600-8A7969289383}" type="datetimeFigureOut">
               <a:rPr lang="en-US" smtClean="0"/>
-              <a:t>6/3/2026</a:t>
+              <a:t>6/28/2026</a:t>
             </a:fld>
             <a:endParaRPr lang="en-US"/>
           </a:p>
@@ -3949,7 +3949,7 @@
           <a:p>
             <a:fld id="{C7AA466E-39B5-4C10-B600-8A7969289383}" type="datetimeFigureOut">
               <a:rPr lang="en-US" smtClean="0"/>
-              <a:t>6/3/2026</a:t>
+              <a:t>6/28/2026</a:t>
             </a:fld>
             <a:endParaRPr lang="en-US"/>
           </a:p>
@@ -4044,7 +4044,7 @@
           <a:p>
             <a:fld id="{C7AA466E-39B5-4C10-B600-8A7969289383}" type="datetimeFigureOut">
               <a:rPr lang="en-US" smtClean="0"/>
-              <a:t>6/3/2026</a:t>
+              <a:t>6/28/2026</a:t>
             </a:fld>
             <a:endParaRPr lang="en-US"/>
           </a:p>
@@ -4299,7 +4299,7 @@
           <a:p>
             <a:fld id="{C7AA466E-39B5-4C10-B600-8A7969289383}" type="datetimeFigureOut">
               <a:rPr lang="en-US" smtClean="0"/>
-              <a:t>6/3/2026</a:t>
+              <a:t>6/28/2026</a:t>
             </a:fld>
             <a:endParaRPr lang="en-US"/>
           </a:p>
@@ -4562,7 +4562,7 @@
           <a:p>
             <a:fld id="{C7AA466E-39B5-4C10-B600-8A7969289383}" type="datetimeFigureOut">
               <a:rPr lang="en-US" smtClean="0"/>
-              <a:t>6/3/2026</a:t>
+              <a:t>6/28/2026</a:t>
             </a:fld>
             <a:endParaRPr lang="en-US"/>
           </a:p>
@@ -5307,7 +5307,7 @@
           <a:p>
             <a:fld id="{C7AA466E-39B5-4C10-B600-8A7969289383}" type="datetimeFigureOut">
               <a:rPr lang="en-US" smtClean="0"/>
-              <a:t>6/3/2026</a:t>
+              <a:t>6/28/2026</a:t>
             </a:fld>
             <a:endParaRPr lang="en-US"/>
           </a:p>
